--- a/docs/Clear Fracture OSINT-Fusion with Belvedere.pptx
+++ b/docs/Clear Fracture OSINT-Fusion with Belvedere.pptx
@@ -5,31 +5,30 @@
     <p:sldMasterId id="2147483648" r:id="rId4"/>
   </p:sldMasterIdLst>
   <p:notesMasterIdLst>
-    <p:notesMasterId r:id="rId12"/>
+    <p:notesMasterId r:id="rId11"/>
   </p:notesMasterIdLst>
   <p:sldIdLst>
     <p:sldId id="256" r:id="rId5"/>
-    <p:sldId id="257" r:id="rId6"/>
+    <p:sldId id="281" r:id="rId6"/>
     <p:sldId id="258" r:id="rId7"/>
-    <p:sldId id="281" r:id="rId8"/>
-    <p:sldId id="259" r:id="rId9"/>
-    <p:sldId id="260" r:id="rId10"/>
-    <p:sldId id="275" r:id="rId11"/>
+    <p:sldId id="257" r:id="rId8"/>
+    <p:sldId id="260" r:id="rId9"/>
+    <p:sldId id="275" r:id="rId10"/>
   </p:sldIdLst>
   <p:sldSz cx="18288000" cy="10287000"/>
   <p:notesSz cx="6858000" cy="9144000"/>
   <p:embeddedFontLst>
     <p:embeddedFont>
       <p:font typeface="Inter" panose="020B0604020202020204" charset="0"/>
+      <p:regular r:id="rId12"/>
+    </p:embeddedFont>
+    <p:embeddedFont>
+      <p:font typeface="Inter Bold" panose="020B0604020202020204" charset="0"/>
       <p:regular r:id="rId13"/>
     </p:embeddedFont>
     <p:embeddedFont>
-      <p:font typeface="Inter Bold" panose="020B0604020202020204" charset="0"/>
+      <p:font typeface="JetBrains Mono" panose="020B0604020202020204" charset="0"/>
       <p:regular r:id="rId14"/>
-    </p:embeddedFont>
-    <p:embeddedFont>
-      <p:font typeface="JetBrains Mono" panose="020B0604020202020204" charset="0"/>
-      <p:regular r:id="rId15"/>
     </p:embeddedFont>
   </p:embeddedFontLst>
   <p:defaultTextStyle>
@@ -936,7 +935,13 @@
   <p:cSld>
     <p:spTree>
       <p:nvGrpSpPr>
-        <p:cNvPr id="1" name=""/>
+        <p:cNvPr id="1" name="">
+          <a:extLst>
+            <a:ext uri="{FF2B5EF4-FFF2-40B4-BE49-F238E27FC236}">
+              <a16:creationId xmlns:a16="http://schemas.microsoft.com/office/drawing/2014/main" id="{D1FB4656-557D-682C-2CDD-ED1C3E54E2F0}"/>
+            </a:ext>
+          </a:extLst>
+        </p:cNvPr>
         <p:cNvGrpSpPr/>
         <p:nvPr/>
       </p:nvGrpSpPr>
@@ -950,7 +955,13 @@
       </p:grpSpPr>
       <p:sp>
         <p:nvSpPr>
-          <p:cNvPr id="2" name="Header Placeholder 1"/>
+          <p:cNvPr id="2" name="Header Placeholder 1">
+            <a:extLst>
+              <a:ext uri="{FF2B5EF4-FFF2-40B4-BE49-F238E27FC236}">
+                <a16:creationId xmlns:a16="http://schemas.microsoft.com/office/drawing/2014/main" id="{10082542-87C1-4A27-D982-1CFD088B542F}"/>
+              </a:ext>
+            </a:extLst>
+          </p:cNvPr>
           <p:cNvSpPr>
             <a:spLocks noGrp="1"/>
           </p:cNvSpPr>
@@ -981,7 +992,13 @@
       </p:sp>
       <p:sp>
         <p:nvSpPr>
-          <p:cNvPr id="3" name="Date Placeholder 2"/>
+          <p:cNvPr id="3" name="Date Placeholder 2">
+            <a:extLst>
+              <a:ext uri="{FF2B5EF4-FFF2-40B4-BE49-F238E27FC236}">
+                <a16:creationId xmlns:a16="http://schemas.microsoft.com/office/drawing/2014/main" id="{E66ADB12-6C2D-11C8-3AA8-050CDE1D4D1C}"/>
+              </a:ext>
+            </a:extLst>
+          </p:cNvPr>
           <p:cNvSpPr>
             <a:spLocks noGrp="1"/>
           </p:cNvSpPr>
@@ -1015,7 +1032,13 @@
       </p:sp>
       <p:sp>
         <p:nvSpPr>
-          <p:cNvPr id="4" name="Slide Image Placeholder 3"/>
+          <p:cNvPr id="4" name="Slide Image Placeholder 3">
+            <a:extLst>
+              <a:ext uri="{FF2B5EF4-FFF2-40B4-BE49-F238E27FC236}">
+                <a16:creationId xmlns:a16="http://schemas.microsoft.com/office/drawing/2014/main" id="{36D8AC80-296A-32F2-8E1C-94DB0DFE6410}"/>
+              </a:ext>
+            </a:extLst>
+          </p:cNvPr>
           <p:cNvSpPr>
             <a:spLocks noGrp="1" noRot="1" noChangeAspect="1"/>
           </p:cNvSpPr>
@@ -1048,7 +1071,13 @@
       </p:sp>
       <p:sp>
         <p:nvSpPr>
-          <p:cNvPr id="5" name="Notes Placeholder 4"/>
+          <p:cNvPr id="5" name="Notes Placeholder 4">
+            <a:extLst>
+              <a:ext uri="{FF2B5EF4-FFF2-40B4-BE49-F238E27FC236}">
+                <a16:creationId xmlns:a16="http://schemas.microsoft.com/office/drawing/2014/main" id="{95924E9B-6809-A676-71FF-D6778309C43C}"/>
+              </a:ext>
+            </a:extLst>
+          </p:cNvPr>
           <p:cNvSpPr>
             <a:spLocks noGrp="1"/>
           </p:cNvSpPr>
@@ -1071,14 +1100,20 @@
           <a:p>
             <a:r>
               <a:rPr lang="en-US"/>
-              <a:t>2</a:t>
+              <a:t>3</a:t>
             </a:r>
           </a:p>
         </p:txBody>
       </p:sp>
       <p:sp>
         <p:nvSpPr>
-          <p:cNvPr id="6" name="Footer Placeholder 5"/>
+          <p:cNvPr id="6" name="Footer Placeholder 5">
+            <a:extLst>
+              <a:ext uri="{FF2B5EF4-FFF2-40B4-BE49-F238E27FC236}">
+                <a16:creationId xmlns:a16="http://schemas.microsoft.com/office/drawing/2014/main" id="{0C83AE97-45B0-2605-1DB6-A5438BF6991C}"/>
+              </a:ext>
+            </a:extLst>
+          </p:cNvPr>
           <p:cNvSpPr>
             <a:spLocks noGrp="1"/>
           </p:cNvSpPr>
@@ -1109,7 +1144,13 @@
       </p:sp>
       <p:sp>
         <p:nvSpPr>
-          <p:cNvPr id="7" name="Slide Number Placeholder 6"/>
+          <p:cNvPr id="7" name="Slide Number Placeholder 6">
+            <a:extLst>
+              <a:ext uri="{FF2B5EF4-FFF2-40B4-BE49-F238E27FC236}">
+                <a16:creationId xmlns:a16="http://schemas.microsoft.com/office/drawing/2014/main" id="{B948B1C6-08D7-C363-3F1B-3B5B3293C393}"/>
+              </a:ext>
+            </a:extLst>
+          </p:cNvPr>
           <p:cNvSpPr>
             <a:spLocks noGrp="1"/>
           </p:cNvSpPr>
@@ -1142,6 +1183,11 @@
         </p:txBody>
       </p:sp>
     </p:spTree>
+    <p:extLst>
+      <p:ext uri="{BB962C8B-B14F-4D97-AF65-F5344CB8AC3E}">
+        <p14:creationId xmlns:p14="http://schemas.microsoft.com/office/powerpoint/2010/main" val="1170153679"/>
+      </p:ext>
+    </p:extLst>
   </p:cSld>
   <p:clrMapOvr>
     <a:masterClrMapping/>
@@ -1372,13 +1418,7 @@
   <p:cSld>
     <p:spTree>
       <p:nvGrpSpPr>
-        <p:cNvPr id="1" name="">
-          <a:extLst>
-            <a:ext uri="{FF2B5EF4-FFF2-40B4-BE49-F238E27FC236}">
-              <a16:creationId xmlns:a16="http://schemas.microsoft.com/office/drawing/2014/main" id="{D1FB4656-557D-682C-2CDD-ED1C3E54E2F0}"/>
-            </a:ext>
-          </a:extLst>
-        </p:cNvPr>
+        <p:cNvPr id="1" name=""/>
         <p:cNvGrpSpPr/>
         <p:nvPr/>
       </p:nvGrpSpPr>
@@ -1392,13 +1432,7 @@
       </p:grpSpPr>
       <p:sp>
         <p:nvSpPr>
-          <p:cNvPr id="2" name="Header Placeholder 1">
-            <a:extLst>
-              <a:ext uri="{FF2B5EF4-FFF2-40B4-BE49-F238E27FC236}">
-                <a16:creationId xmlns:a16="http://schemas.microsoft.com/office/drawing/2014/main" id="{10082542-87C1-4A27-D982-1CFD088B542F}"/>
-              </a:ext>
-            </a:extLst>
-          </p:cNvPr>
+          <p:cNvPr id="2" name="Header Placeholder 1"/>
           <p:cNvSpPr>
             <a:spLocks noGrp="1"/>
           </p:cNvSpPr>
@@ -1429,13 +1463,7 @@
       </p:sp>
       <p:sp>
         <p:nvSpPr>
-          <p:cNvPr id="3" name="Date Placeholder 2">
-            <a:extLst>
-              <a:ext uri="{FF2B5EF4-FFF2-40B4-BE49-F238E27FC236}">
-                <a16:creationId xmlns:a16="http://schemas.microsoft.com/office/drawing/2014/main" id="{E66ADB12-6C2D-11C8-3AA8-050CDE1D4D1C}"/>
-              </a:ext>
-            </a:extLst>
-          </p:cNvPr>
+          <p:cNvPr id="3" name="Date Placeholder 2"/>
           <p:cNvSpPr>
             <a:spLocks noGrp="1"/>
           </p:cNvSpPr>
@@ -1469,13 +1497,7 @@
       </p:sp>
       <p:sp>
         <p:nvSpPr>
-          <p:cNvPr id="4" name="Slide Image Placeholder 3">
-            <a:extLst>
-              <a:ext uri="{FF2B5EF4-FFF2-40B4-BE49-F238E27FC236}">
-                <a16:creationId xmlns:a16="http://schemas.microsoft.com/office/drawing/2014/main" id="{36D8AC80-296A-32F2-8E1C-94DB0DFE6410}"/>
-              </a:ext>
-            </a:extLst>
-          </p:cNvPr>
+          <p:cNvPr id="4" name="Slide Image Placeholder 3"/>
           <p:cNvSpPr>
             <a:spLocks noGrp="1" noRot="1" noChangeAspect="1"/>
           </p:cNvSpPr>
@@ -1508,13 +1530,7 @@
       </p:sp>
       <p:sp>
         <p:nvSpPr>
-          <p:cNvPr id="5" name="Notes Placeholder 4">
-            <a:extLst>
-              <a:ext uri="{FF2B5EF4-FFF2-40B4-BE49-F238E27FC236}">
-                <a16:creationId xmlns:a16="http://schemas.microsoft.com/office/drawing/2014/main" id="{95924E9B-6809-A676-71FF-D6778309C43C}"/>
-              </a:ext>
-            </a:extLst>
-          </p:cNvPr>
+          <p:cNvPr id="5" name="Notes Placeholder 4"/>
           <p:cNvSpPr>
             <a:spLocks noGrp="1"/>
           </p:cNvSpPr>
@@ -1537,20 +1553,14 @@
           <a:p>
             <a:r>
               <a:rPr lang="en-US"/>
-              <a:t>3</a:t>
+              <a:t>2</a:t>
             </a:r>
           </a:p>
         </p:txBody>
       </p:sp>
       <p:sp>
         <p:nvSpPr>
-          <p:cNvPr id="6" name="Footer Placeholder 5">
-            <a:extLst>
-              <a:ext uri="{FF2B5EF4-FFF2-40B4-BE49-F238E27FC236}">
-                <a16:creationId xmlns:a16="http://schemas.microsoft.com/office/drawing/2014/main" id="{0C83AE97-45B0-2605-1DB6-A5438BF6991C}"/>
-              </a:ext>
-            </a:extLst>
-          </p:cNvPr>
+          <p:cNvPr id="6" name="Footer Placeholder 5"/>
           <p:cNvSpPr>
             <a:spLocks noGrp="1"/>
           </p:cNvSpPr>
@@ -1581,13 +1591,7 @@
       </p:sp>
       <p:sp>
         <p:nvSpPr>
-          <p:cNvPr id="7" name="Slide Number Placeholder 6">
-            <a:extLst>
-              <a:ext uri="{FF2B5EF4-FFF2-40B4-BE49-F238E27FC236}">
-                <a16:creationId xmlns:a16="http://schemas.microsoft.com/office/drawing/2014/main" id="{B948B1C6-08D7-C363-3F1B-3B5B3293C393}"/>
-              </a:ext>
-            </a:extLst>
-          </p:cNvPr>
+          <p:cNvPr id="7" name="Slide Number Placeholder 6"/>
           <p:cNvSpPr>
             <a:spLocks noGrp="1"/>
           </p:cNvSpPr>
@@ -1620,11 +1624,6 @@
         </p:txBody>
       </p:sp>
     </p:spTree>
-    <p:extLst>
-      <p:ext uri="{BB962C8B-B14F-4D97-AF65-F5344CB8AC3E}">
-        <p14:creationId xmlns:p14="http://schemas.microsoft.com/office/powerpoint/2010/main" val="1170153679"/>
-      </p:ext>
-    </p:extLst>
   </p:cSld>
   <p:clrMapOvr>
     <a:masterClrMapping/>
@@ -1772,7 +1771,7 @@
           <a:p>
             <a:r>
               <a:rPr lang="en-US"/>
-              <a:t>3</a:t>
+              <a:t>10</a:t>
             </a:r>
           </a:p>
         </p:txBody>
@@ -1851,224 +1850,6 @@
 </file>
 
 <file path=ppt/notesSlides/notesSlide6.xml><?xml version="1.0" encoding="utf-8"?>
-<p:notes xmlns:a="http://schemas.openxmlformats.org/drawingml/2006/main" xmlns:r="http://schemas.openxmlformats.org/officeDocument/2006/relationships" xmlns:p="http://schemas.openxmlformats.org/presentationml/2006/main">
-  <p:cSld>
-    <p:spTree>
-      <p:nvGrpSpPr>
-        <p:cNvPr id="1" name=""/>
-        <p:cNvGrpSpPr/>
-        <p:nvPr/>
-      </p:nvGrpSpPr>
-      <p:grpSpPr>
-        <a:xfrm>
-          <a:off x="0" y="0"/>
-          <a:ext cx="0" cy="0"/>
-          <a:chOff x="0" y="0"/>
-          <a:chExt cx="0" cy="0"/>
-        </a:xfrm>
-      </p:grpSpPr>
-      <p:sp>
-        <p:nvSpPr>
-          <p:cNvPr id="2" name="Header Placeholder 1"/>
-          <p:cNvSpPr>
-            <a:spLocks noGrp="1"/>
-          </p:cNvSpPr>
-          <p:nvPr>
-            <p:ph type="hdr" sz="quarter"/>
-          </p:nvPr>
-        </p:nvSpPr>
-        <p:spPr>
-          <a:xfrm>
-            <a:off x="0" y="0"/>
-            <a:ext cx="3962400" cy="342900"/>
-          </a:xfrm>
-          <a:prstGeom prst="rect">
-            <a:avLst/>
-          </a:prstGeom>
-        </p:spPr>
-        <p:txBody>
-          <a:bodyPr vert="horz" lIns="91440" tIns="45720" rIns="91440" bIns="45720" rtlCol="0"/>
-          <a:lstStyle>
-            <a:lvl1pPr algn="l">
-              <a:defRPr sz="1200"/>
-            </a:lvl1pPr>
-          </a:lstStyle>
-          <a:p>
-            <a:endParaRPr/>
-          </a:p>
-        </p:txBody>
-      </p:sp>
-      <p:sp>
-        <p:nvSpPr>
-          <p:cNvPr id="3" name="Date Placeholder 2"/>
-          <p:cNvSpPr>
-            <a:spLocks noGrp="1"/>
-          </p:cNvSpPr>
-          <p:nvPr>
-            <p:ph type="dt" idx="1"/>
-          </p:nvPr>
-        </p:nvSpPr>
-        <p:spPr>
-          <a:xfrm>
-            <a:off x="5180013" y="0"/>
-            <a:ext cx="3962400" cy="342900"/>
-          </a:xfrm>
-          <a:prstGeom prst="rect">
-            <a:avLst/>
-          </a:prstGeom>
-        </p:spPr>
-        <p:txBody>
-          <a:bodyPr vert="horz" lIns="91440" tIns="45720" rIns="91440" bIns="45720" rtlCol="0"/>
-          <a:lstStyle>
-            <a:lvl1pPr algn="r">
-              <a:defRPr sz="1200"/>
-            </a:lvl1pPr>
-          </a:lstStyle>
-          <a:p>
-            <a:r>
-              <a:rPr lang="cs-CZ"/>
-              <a:t>1.7.2013</a:t>
-            </a:r>
-          </a:p>
-        </p:txBody>
-      </p:sp>
-      <p:sp>
-        <p:nvSpPr>
-          <p:cNvPr id="4" name="Slide Image Placeholder 3"/>
-          <p:cNvSpPr>
-            <a:spLocks noGrp="1" noRot="1" noChangeAspect="1"/>
-          </p:cNvSpPr>
-          <p:nvPr>
-            <p:ph type="sldImg" idx="2"/>
-          </p:nvPr>
-        </p:nvSpPr>
-        <p:spPr>
-          <a:xfrm>
-            <a:off x="2290763" y="512763"/>
-            <a:ext cx="4562475" cy="2566987"/>
-          </a:xfrm>
-          <a:prstGeom prst="rect">
-            <a:avLst/>
-          </a:prstGeom>
-          <a:noFill/>
-          <a:ln w="12700">
-            <a:solidFill>
-              <a:prstClr val="black"/>
-            </a:solidFill>
-          </a:ln>
-        </p:spPr>
-        <p:txBody>
-          <a:bodyPr vert="horz" lIns="91440" tIns="45720" rIns="91440" bIns="45720" rtlCol="0" anchor="ctr"/>
-          <a:lstStyle/>
-          <a:p>
-            <a:endParaRPr/>
-          </a:p>
-        </p:txBody>
-      </p:sp>
-      <p:sp>
-        <p:nvSpPr>
-          <p:cNvPr id="5" name="Notes Placeholder 4"/>
-          <p:cNvSpPr>
-            <a:spLocks noGrp="1"/>
-          </p:cNvSpPr>
-          <p:nvPr>
-            <p:ph type="body" sz="quarter" idx="3"/>
-          </p:nvPr>
-        </p:nvSpPr>
-        <p:spPr>
-          <a:xfrm>
-            <a:off x="914400" y="3251200"/>
-            <a:ext cx="7315200" cy="3081338"/>
-          </a:xfrm>
-          <a:prstGeom prst="rect">
-            <a:avLst/>
-          </a:prstGeom>
-        </p:spPr>
-        <p:txBody>
-          <a:bodyPr vert="horz" lIns="91440" tIns="45720" rIns="91440" bIns="45720" rtlCol="0"/>
-          <a:lstStyle/>
-          <a:p>
-            <a:r>
-              <a:rPr lang="en-US"/>
-              <a:t>10</a:t>
-            </a:r>
-          </a:p>
-        </p:txBody>
-      </p:sp>
-      <p:sp>
-        <p:nvSpPr>
-          <p:cNvPr id="6" name="Footer Placeholder 5"/>
-          <p:cNvSpPr>
-            <a:spLocks noGrp="1"/>
-          </p:cNvSpPr>
-          <p:nvPr>
-            <p:ph type="ftr" sz="quarter" idx="4"/>
-          </p:nvPr>
-        </p:nvSpPr>
-        <p:spPr>
-          <a:xfrm>
-            <a:off x="0" y="6502400"/>
-            <a:ext cx="3962400" cy="341313"/>
-          </a:xfrm>
-          <a:prstGeom prst="rect">
-            <a:avLst/>
-          </a:prstGeom>
-        </p:spPr>
-        <p:txBody>
-          <a:bodyPr vert="horz" lIns="91440" tIns="45720" rIns="91440" bIns="45720" rtlCol="0" anchor="b"/>
-          <a:lstStyle>
-            <a:lvl1pPr algn="l">
-              <a:defRPr sz="1200"/>
-            </a:lvl1pPr>
-          </a:lstStyle>
-          <a:p>
-            <a:endParaRPr/>
-          </a:p>
-        </p:txBody>
-      </p:sp>
-      <p:sp>
-        <p:nvSpPr>
-          <p:cNvPr id="7" name="Slide Number Placeholder 6"/>
-          <p:cNvSpPr>
-            <a:spLocks noGrp="1"/>
-          </p:cNvSpPr>
-          <p:nvPr>
-            <p:ph type="sldNum" sz="quarter" idx="5"/>
-          </p:nvPr>
-        </p:nvSpPr>
-        <p:spPr>
-          <a:xfrm>
-            <a:off x="5180013" y="6502400"/>
-            <a:ext cx="3962400" cy="341313"/>
-          </a:xfrm>
-          <a:prstGeom prst="rect">
-            <a:avLst/>
-          </a:prstGeom>
-        </p:spPr>
-        <p:txBody>
-          <a:bodyPr vert="horz" lIns="91440" tIns="45720" rIns="91440" bIns="45720" rtlCol="0" anchor="b"/>
-          <a:lstStyle>
-            <a:lvl1pPr algn="r">
-              <a:defRPr sz="1200"/>
-            </a:lvl1pPr>
-          </a:lstStyle>
-          <a:p>
-            <a:r>
-              <a:rPr lang="cs-CZ"/>
-              <a:t>‹#›</a:t>
-            </a:r>
-          </a:p>
-        </p:txBody>
-      </p:sp>
-    </p:spTree>
-  </p:cSld>
-  <p:clrMapOvr>
-    <a:masterClrMapping/>
-  </p:clrMapOvr>
-</p:notes>
-</file>
-
-<file path=ppt/notesSlides/notesSlide7.xml><?xml version="1.0" encoding="utf-8"?>
 <p:notes xmlns:a="http://schemas.openxmlformats.org/drawingml/2006/main" xmlns:r="http://schemas.openxmlformats.org/officeDocument/2006/relationships" xmlns:p="http://schemas.openxmlformats.org/presentationml/2006/main">
   <p:cSld>
     <p:spTree>
@@ -5877,1672 +5658,6 @@
     </p:bg>
     <p:spTree>
       <p:nvGrpSpPr>
-        <p:cNvPr id="1" name=""/>
-        <p:cNvGrpSpPr/>
-        <p:nvPr/>
-      </p:nvGrpSpPr>
-      <p:grpSpPr>
-        <a:xfrm>
-          <a:off x="0" y="0"/>
-          <a:ext cx="0" cy="0"/>
-          <a:chOff x="0" y="0"/>
-          <a:chExt cx="0" cy="0"/>
-        </a:xfrm>
-      </p:grpSpPr>
-      <p:grpSp>
-        <p:nvGrpSpPr>
-          <p:cNvPr id="2" name="Group 2"/>
-          <p:cNvGrpSpPr/>
-          <p:nvPr/>
-        </p:nvGrpSpPr>
-        <p:grpSpPr>
-          <a:xfrm>
-            <a:off x="754971" y="466706"/>
-            <a:ext cx="13040392" cy="411802"/>
-            <a:chOff x="0" y="0"/>
-            <a:chExt cx="17387189" cy="549069"/>
-          </a:xfrm>
-        </p:grpSpPr>
-        <p:sp>
-          <p:nvSpPr>
-            <p:cNvPr id="3" name="Freeform 3"/>
-            <p:cNvSpPr/>
-            <p:nvPr/>
-          </p:nvSpPr>
-          <p:spPr>
-            <a:xfrm>
-              <a:off x="0" y="0"/>
-              <a:ext cx="17387184" cy="549066"/>
-            </a:xfrm>
-            <a:custGeom>
-              <a:avLst/>
-              <a:gdLst/>
-              <a:ahLst/>
-              <a:cxnLst/>
-              <a:rect l="l" t="t" r="r" b="b"/>
-              <a:pathLst>
-                <a:path w="17387184" h="549066">
-                  <a:moveTo>
-                    <a:pt x="0" y="0"/>
-                  </a:moveTo>
-                  <a:lnTo>
-                    <a:pt x="17387184" y="0"/>
-                  </a:lnTo>
-                  <a:lnTo>
-                    <a:pt x="17387184" y="549066"/>
-                  </a:lnTo>
-                  <a:lnTo>
-                    <a:pt x="0" y="549066"/>
-                  </a:lnTo>
-                  <a:close/>
-                </a:path>
-              </a:pathLst>
-            </a:custGeom>
-            <a:blipFill>
-              <a:blip r:embed="rId3">
-                <a:alphaModFix amt="0"/>
-              </a:blip>
-              <a:stretch>
-                <a:fillRect t="-567029" b="-567030"/>
-              </a:stretch>
-            </a:blipFill>
-          </p:spPr>
-          <p:txBody>
-            <a:bodyPr/>
-            <a:lstStyle/>
-            <a:p>
-              <a:endParaRPr lang="en-US"/>
-            </a:p>
-          </p:txBody>
-        </p:sp>
-        <p:sp>
-          <p:nvSpPr>
-            <p:cNvPr id="4" name="TextBox 4"/>
-            <p:cNvSpPr txBox="1"/>
-            <p:nvPr/>
-          </p:nvSpPr>
-          <p:spPr>
-            <a:xfrm>
-              <a:off x="0" y="-9525"/>
-              <a:ext cx="17387189" cy="558594"/>
-            </a:xfrm>
-            <a:prstGeom prst="rect">
-              <a:avLst/>
-            </a:prstGeom>
-          </p:spPr>
-          <p:txBody>
-            <a:bodyPr lIns="0" tIns="0" rIns="0" bIns="0" rtlCol="0" anchor="ctr"/>
-            <a:lstStyle/>
-            <a:p>
-              <a:pPr algn="l">
-                <a:lnSpc>
-                  <a:spcPts val="1801"/>
-                </a:lnSpc>
-              </a:pPr>
-              <a:r>
-                <a:rPr lang="en-US" sz="1501" spc="375" dirty="0">
-                  <a:solidFill>
-                    <a:srgbClr val="FFF2C2"/>
-                  </a:solidFill>
-                  <a:latin typeface="JetBrains Mono"/>
-                  <a:ea typeface="JetBrains Mono"/>
-                  <a:cs typeface="JetBrains Mono"/>
-                  <a:sym typeface="JetBrains Mono"/>
-                </a:rPr>
-                <a:t>THE AGE-OLD PROBLEM</a:t>
-              </a:r>
-            </a:p>
-          </p:txBody>
-        </p:sp>
-      </p:grpSp>
-      <p:grpSp>
-        <p:nvGrpSpPr>
-          <p:cNvPr id="5" name="Group 5"/>
-          <p:cNvGrpSpPr/>
-          <p:nvPr/>
-        </p:nvGrpSpPr>
-        <p:grpSpPr>
-          <a:xfrm>
-            <a:off x="713794" y="796147"/>
-            <a:ext cx="15511196" cy="851057"/>
-            <a:chOff x="0" y="0"/>
-            <a:chExt cx="20681594" cy="1134743"/>
-          </a:xfrm>
-        </p:grpSpPr>
-        <p:sp>
-          <p:nvSpPr>
-            <p:cNvPr id="6" name="Freeform 6"/>
-            <p:cNvSpPr/>
-            <p:nvPr/>
-          </p:nvSpPr>
-          <p:spPr>
-            <a:xfrm>
-              <a:off x="0" y="0"/>
-              <a:ext cx="20681598" cy="1134740"/>
-            </a:xfrm>
-            <a:custGeom>
-              <a:avLst/>
-              <a:gdLst/>
-              <a:ahLst/>
-              <a:cxnLst/>
-              <a:rect l="l" t="t" r="r" b="b"/>
-              <a:pathLst>
-                <a:path w="20681598" h="1134740">
-                  <a:moveTo>
-                    <a:pt x="0" y="0"/>
-                  </a:moveTo>
-                  <a:lnTo>
-                    <a:pt x="20681598" y="0"/>
-                  </a:lnTo>
-                  <a:lnTo>
-                    <a:pt x="20681598" y="1134740"/>
-                  </a:lnTo>
-                  <a:lnTo>
-                    <a:pt x="0" y="1134740"/>
-                  </a:lnTo>
-                  <a:close/>
-                </a:path>
-              </a:pathLst>
-            </a:custGeom>
-            <a:blipFill>
-              <a:blip r:embed="rId3">
-                <a:alphaModFix amt="0"/>
-              </a:blip>
-              <a:stretch>
-                <a:fillRect t="-305131" b="-305131"/>
-              </a:stretch>
-            </a:blipFill>
-          </p:spPr>
-          <p:txBody>
-            <a:bodyPr/>
-            <a:lstStyle/>
-            <a:p>
-              <a:endParaRPr lang="en-US"/>
-            </a:p>
-          </p:txBody>
-        </p:sp>
-        <p:sp>
-          <p:nvSpPr>
-            <p:cNvPr id="7" name="TextBox 7"/>
-            <p:cNvSpPr txBox="1"/>
-            <p:nvPr/>
-          </p:nvSpPr>
-          <p:spPr>
-            <a:xfrm>
-              <a:off x="0" y="0"/>
-              <a:ext cx="20681594" cy="1134743"/>
-            </a:xfrm>
-            <a:prstGeom prst="rect">
-              <a:avLst/>
-            </a:prstGeom>
-          </p:spPr>
-          <p:txBody>
-            <a:bodyPr lIns="0" tIns="0" rIns="0" bIns="0" rtlCol="0" anchor="ctr"/>
-            <a:lstStyle/>
-            <a:p>
-              <a:pPr algn="l">
-                <a:lnSpc>
-                  <a:spcPts val="4683"/>
-                </a:lnSpc>
-              </a:pPr>
-              <a:r>
-                <a:rPr lang="en-US" sz="3903" b="1" dirty="0">
-                  <a:solidFill>
-                    <a:srgbClr val="F0F1F4"/>
-                  </a:solidFill>
-                  <a:latin typeface="Inter Bold"/>
-                  <a:ea typeface="Inter Bold"/>
-                  <a:cs typeface="Inter Bold"/>
-                  <a:sym typeface="Inter Bold"/>
-                </a:rPr>
-                <a:t>Every Feed Ends in </a:t>
-              </a:r>
-              <a:r>
-                <a:rPr lang="en-US" sz="3903" b="1" dirty="0">
-                  <a:solidFill>
-                    <a:srgbClr val="FFF2C2"/>
-                  </a:solidFill>
-                  <a:latin typeface="Inter Bold"/>
-                  <a:ea typeface="Inter Bold"/>
-                  <a:cs typeface="Inter Bold"/>
-                  <a:sym typeface="Inter Bold"/>
-                </a:rPr>
-                <a:t>a Person's Queue</a:t>
-              </a:r>
-            </a:p>
-          </p:txBody>
-        </p:sp>
-      </p:grpSp>
-      <p:grpSp>
-        <p:nvGrpSpPr>
-          <p:cNvPr id="8" name="Group 8"/>
-          <p:cNvGrpSpPr/>
-          <p:nvPr/>
-        </p:nvGrpSpPr>
-        <p:grpSpPr>
-          <a:xfrm>
-            <a:off x="16217001" y="466706"/>
-            <a:ext cx="1329868" cy="1386403"/>
-            <a:chOff x="0" y="0"/>
-            <a:chExt cx="1053363" cy="1098144"/>
-          </a:xfrm>
-        </p:grpSpPr>
-        <p:sp>
-          <p:nvSpPr>
-            <p:cNvPr id="9" name="Freeform 9" descr="/Users/hstrauss/Documents/GitHub/belvedere-pm/output/deck-rebuild/belv_mark.png"/>
-            <p:cNvSpPr/>
-            <p:nvPr/>
-          </p:nvSpPr>
-          <p:spPr>
-            <a:xfrm>
-              <a:off x="0" y="0"/>
-              <a:ext cx="1053338" cy="1098169"/>
-            </a:xfrm>
-            <a:custGeom>
-              <a:avLst/>
-              <a:gdLst/>
-              <a:ahLst/>
-              <a:cxnLst/>
-              <a:rect l="l" t="t" r="r" b="b"/>
-              <a:pathLst>
-                <a:path w="1053338" h="1098169">
-                  <a:moveTo>
-                    <a:pt x="0" y="0"/>
-                  </a:moveTo>
-                  <a:lnTo>
-                    <a:pt x="1053338" y="0"/>
-                  </a:lnTo>
-                  <a:lnTo>
-                    <a:pt x="1053338" y="1098169"/>
-                  </a:lnTo>
-                  <a:lnTo>
-                    <a:pt x="0" y="1098169"/>
-                  </a:lnTo>
-                  <a:lnTo>
-                    <a:pt x="0" y="0"/>
-                  </a:lnTo>
-                  <a:close/>
-                </a:path>
-              </a:pathLst>
-            </a:custGeom>
-            <a:blipFill>
-              <a:blip r:embed="rId4"/>
-              <a:stretch>
-                <a:fillRect r="-2" b="2"/>
-              </a:stretch>
-            </a:blipFill>
-          </p:spPr>
-          <p:txBody>
-            <a:bodyPr/>
-            <a:lstStyle/>
-            <a:p>
-              <a:endParaRPr lang="en-US"/>
-            </a:p>
-          </p:txBody>
-        </p:sp>
-      </p:grpSp>
-      <p:grpSp>
-        <p:nvGrpSpPr>
-          <p:cNvPr id="10" name="Group 10"/>
-          <p:cNvGrpSpPr/>
-          <p:nvPr/>
-        </p:nvGrpSpPr>
-        <p:grpSpPr>
-          <a:xfrm>
-            <a:off x="727520" y="1619755"/>
-            <a:ext cx="16472068" cy="466709"/>
-            <a:chOff x="0" y="0"/>
-            <a:chExt cx="21962758" cy="622278"/>
-          </a:xfrm>
-        </p:grpSpPr>
-        <p:sp>
-          <p:nvSpPr>
-            <p:cNvPr id="11" name="Freeform 11"/>
-            <p:cNvSpPr/>
-            <p:nvPr/>
-          </p:nvSpPr>
-          <p:spPr>
-            <a:xfrm>
-              <a:off x="0" y="0"/>
-              <a:ext cx="21962759" cy="622282"/>
-            </a:xfrm>
-            <a:custGeom>
-              <a:avLst/>
-              <a:gdLst/>
-              <a:ahLst/>
-              <a:cxnLst/>
-              <a:rect l="l" t="t" r="r" b="b"/>
-              <a:pathLst>
-                <a:path w="21962759" h="622282">
-                  <a:moveTo>
-                    <a:pt x="0" y="0"/>
-                  </a:moveTo>
-                  <a:lnTo>
-                    <a:pt x="21962759" y="0"/>
-                  </a:lnTo>
-                  <a:lnTo>
-                    <a:pt x="21962759" y="622282"/>
-                  </a:lnTo>
-                  <a:lnTo>
-                    <a:pt x="0" y="622282"/>
-                  </a:lnTo>
-                  <a:close/>
-                </a:path>
-              </a:pathLst>
-            </a:custGeom>
-            <a:blipFill>
-              <a:blip r:embed="rId3">
-                <a:alphaModFix amt="0"/>
-              </a:blip>
-              <a:stretch>
-                <a:fillRect t="-637703" b="-637702"/>
-              </a:stretch>
-            </a:blipFill>
-          </p:spPr>
-          <p:txBody>
-            <a:bodyPr/>
-            <a:lstStyle/>
-            <a:p>
-              <a:endParaRPr lang="en-US"/>
-            </a:p>
-          </p:txBody>
-        </p:sp>
-        <p:sp>
-          <p:nvSpPr>
-            <p:cNvPr id="12" name="TextBox 12"/>
-            <p:cNvSpPr txBox="1"/>
-            <p:nvPr/>
-          </p:nvSpPr>
-          <p:spPr>
-            <a:xfrm>
-              <a:off x="0" y="-9525"/>
-              <a:ext cx="21962758" cy="631803"/>
-            </a:xfrm>
-            <a:prstGeom prst="rect">
-              <a:avLst/>
-            </a:prstGeom>
-          </p:spPr>
-          <p:txBody>
-            <a:bodyPr lIns="0" tIns="0" rIns="0" bIns="0" rtlCol="0" anchor="ctr"/>
-            <a:lstStyle/>
-            <a:p>
-              <a:pPr algn="l">
-                <a:lnSpc>
-                  <a:spcPts val="2341"/>
-                </a:lnSpc>
-              </a:pPr>
-              <a:r>
-                <a:rPr lang="en-US" sz="1951" dirty="0">
-                  <a:solidFill>
-                    <a:srgbClr val="9BA4BE"/>
-                  </a:solidFill>
-                  <a:latin typeface="Inter"/>
-                  <a:ea typeface="Inter"/>
-                  <a:cs typeface="Inter"/>
-                  <a:sym typeface="Inter"/>
-                </a:rPr>
-                <a:t>Databases, APIs, files, streams, buckets, models, pipelines. Each one waits on a data engineering specialist.</a:t>
-              </a:r>
-            </a:p>
-          </p:txBody>
-        </p:sp>
-      </p:grpSp>
-      <p:grpSp>
-        <p:nvGrpSpPr>
-          <p:cNvPr id="13" name="Group 13"/>
-          <p:cNvGrpSpPr/>
-          <p:nvPr/>
-        </p:nvGrpSpPr>
-        <p:grpSpPr>
-          <a:xfrm>
-            <a:off x="754971" y="2168823"/>
-            <a:ext cx="16791899" cy="15097"/>
-            <a:chOff x="0" y="0"/>
-            <a:chExt cx="22389198" cy="20130"/>
-          </a:xfrm>
-        </p:grpSpPr>
-        <p:sp>
-          <p:nvSpPr>
-            <p:cNvPr id="14" name="Freeform 14"/>
-            <p:cNvSpPr/>
-            <p:nvPr/>
-          </p:nvSpPr>
-          <p:spPr>
-            <a:xfrm>
-              <a:off x="0" y="0"/>
-              <a:ext cx="22389212" cy="20193"/>
-            </a:xfrm>
-            <a:custGeom>
-              <a:avLst/>
-              <a:gdLst/>
-              <a:ahLst/>
-              <a:cxnLst/>
-              <a:rect l="l" t="t" r="r" b="b"/>
-              <a:pathLst>
-                <a:path w="22389212" h="20193">
-                  <a:moveTo>
-                    <a:pt x="0" y="0"/>
-                  </a:moveTo>
-                  <a:lnTo>
-                    <a:pt x="22389212" y="0"/>
-                  </a:lnTo>
-                  <a:lnTo>
-                    <a:pt x="22389212" y="20193"/>
-                  </a:lnTo>
-                  <a:lnTo>
-                    <a:pt x="0" y="20193"/>
-                  </a:lnTo>
-                  <a:close/>
-                </a:path>
-              </a:pathLst>
-            </a:custGeom>
-            <a:solidFill>
-              <a:srgbClr val="1A2D5A"/>
-            </a:solidFill>
-          </p:spPr>
-          <p:txBody>
-            <a:bodyPr/>
-            <a:lstStyle/>
-            <a:p>
-              <a:endParaRPr lang="en-US"/>
-            </a:p>
-          </p:txBody>
-        </p:sp>
-      </p:grpSp>
-      <p:grpSp>
-        <p:nvGrpSpPr>
-          <p:cNvPr id="15" name="Group 15"/>
-          <p:cNvGrpSpPr/>
-          <p:nvPr/>
-        </p:nvGrpSpPr>
-        <p:grpSpPr>
-          <a:xfrm>
-            <a:off x="0" y="9773431"/>
-            <a:ext cx="18301840" cy="343167"/>
-            <a:chOff x="0" y="0"/>
-            <a:chExt cx="24402453" cy="457556"/>
-          </a:xfrm>
-        </p:grpSpPr>
-        <p:sp>
-          <p:nvSpPr>
-            <p:cNvPr id="16" name="Freeform 16"/>
-            <p:cNvSpPr/>
-            <p:nvPr/>
-          </p:nvSpPr>
-          <p:spPr>
-            <a:xfrm>
-              <a:off x="0" y="0"/>
-              <a:ext cx="24402455" cy="457557"/>
-            </a:xfrm>
-            <a:custGeom>
-              <a:avLst/>
-              <a:gdLst/>
-              <a:ahLst/>
-              <a:cxnLst/>
-              <a:rect l="l" t="t" r="r" b="b"/>
-              <a:pathLst>
-                <a:path w="24402455" h="457557">
-                  <a:moveTo>
-                    <a:pt x="0" y="0"/>
-                  </a:moveTo>
-                  <a:lnTo>
-                    <a:pt x="24402455" y="0"/>
-                  </a:lnTo>
-                  <a:lnTo>
-                    <a:pt x="24402455" y="457557"/>
-                  </a:lnTo>
-                  <a:lnTo>
-                    <a:pt x="0" y="457557"/>
-                  </a:lnTo>
-                  <a:close/>
-                </a:path>
-              </a:pathLst>
-            </a:custGeom>
-            <a:blipFill>
-              <a:blip r:embed="rId3">
-                <a:alphaModFix amt="0"/>
-              </a:blip>
-              <a:stretch>
-                <a:fillRect t="-989176" b="-989175"/>
-              </a:stretch>
-            </a:blipFill>
-          </p:spPr>
-          <p:txBody>
-            <a:bodyPr/>
-            <a:lstStyle/>
-            <a:p>
-              <a:endParaRPr lang="en-US"/>
-            </a:p>
-          </p:txBody>
-        </p:sp>
-        <p:sp>
-          <p:nvSpPr>
-            <p:cNvPr id="17" name="TextBox 17"/>
-            <p:cNvSpPr txBox="1"/>
-            <p:nvPr/>
-          </p:nvSpPr>
-          <p:spPr>
-            <a:xfrm>
-              <a:off x="0" y="0"/>
-              <a:ext cx="24402453" cy="457556"/>
-            </a:xfrm>
-            <a:prstGeom prst="rect">
-              <a:avLst/>
-            </a:prstGeom>
-          </p:spPr>
-          <p:txBody>
-            <a:bodyPr lIns="0" tIns="0" rIns="0" bIns="0" rtlCol="0" anchor="ctr"/>
-            <a:lstStyle/>
-            <a:p>
-              <a:pPr algn="ctr">
-                <a:lnSpc>
-                  <a:spcPts val="1351"/>
-                </a:lnSpc>
-              </a:pPr>
-              <a:r>
-                <a:rPr lang="en-US" sz="1125" spc="450">
-                  <a:solidFill>
-                    <a:srgbClr val="8590B3"/>
-                  </a:solidFill>
-                  <a:latin typeface="JetBrains Mono"/>
-                  <a:ea typeface="JetBrains Mono"/>
-                  <a:cs typeface="JetBrains Mono"/>
-                  <a:sym typeface="JetBrains Mono"/>
-                </a:rPr>
-                <a:t>CLEARFRACTURE.AI</a:t>
-              </a:r>
-            </a:p>
-          </p:txBody>
-        </p:sp>
-      </p:grpSp>
-      <p:grpSp>
-        <p:nvGrpSpPr>
-          <p:cNvPr id="18" name="Group 18"/>
-          <p:cNvGrpSpPr/>
-          <p:nvPr/>
-        </p:nvGrpSpPr>
-        <p:grpSpPr>
-          <a:xfrm>
-            <a:off x="17135065" y="9773431"/>
-            <a:ext cx="823608" cy="343168"/>
-            <a:chOff x="0" y="0"/>
-            <a:chExt cx="1098144" cy="457557"/>
-          </a:xfrm>
-        </p:grpSpPr>
-        <p:sp>
-          <p:nvSpPr>
-            <p:cNvPr id="19" name="Freeform 19"/>
-            <p:cNvSpPr/>
-            <p:nvPr/>
-          </p:nvSpPr>
-          <p:spPr>
-            <a:xfrm>
-              <a:off x="0" y="0"/>
-              <a:ext cx="1098138" cy="457559"/>
-            </a:xfrm>
-            <a:custGeom>
-              <a:avLst/>
-              <a:gdLst/>
-              <a:ahLst/>
-              <a:cxnLst/>
-              <a:rect l="l" t="t" r="r" b="b"/>
-              <a:pathLst>
-                <a:path w="1098138" h="457559">
-                  <a:moveTo>
-                    <a:pt x="0" y="0"/>
-                  </a:moveTo>
-                  <a:lnTo>
-                    <a:pt x="1098138" y="0"/>
-                  </a:lnTo>
-                  <a:lnTo>
-                    <a:pt x="1098138" y="457559"/>
-                  </a:lnTo>
-                  <a:lnTo>
-                    <a:pt x="0" y="457559"/>
-                  </a:lnTo>
-                  <a:close/>
-                </a:path>
-              </a:pathLst>
-            </a:custGeom>
-            <a:blipFill>
-              <a:blip r:embed="rId3">
-                <a:alphaModFix amt="0"/>
-              </a:blip>
-              <a:stretch>
-                <a:fillRect l="-3459" r="-3459"/>
-              </a:stretch>
-            </a:blipFill>
-          </p:spPr>
-          <p:txBody>
-            <a:bodyPr/>
-            <a:lstStyle/>
-            <a:p>
-              <a:endParaRPr lang="en-US"/>
-            </a:p>
-          </p:txBody>
-        </p:sp>
-        <p:sp>
-          <p:nvSpPr>
-            <p:cNvPr id="20" name="TextBox 20"/>
-            <p:cNvSpPr txBox="1"/>
-            <p:nvPr/>
-          </p:nvSpPr>
-          <p:spPr>
-            <a:xfrm>
-              <a:off x="0" y="0"/>
-              <a:ext cx="1098144" cy="457557"/>
-            </a:xfrm>
-            <a:prstGeom prst="rect">
-              <a:avLst/>
-            </a:prstGeom>
-          </p:spPr>
-          <p:txBody>
-            <a:bodyPr lIns="0" tIns="0" rIns="0" bIns="0" rtlCol="0" anchor="ctr"/>
-            <a:lstStyle/>
-            <a:p>
-              <a:pPr algn="r">
-                <a:lnSpc>
-                  <a:spcPts val="1351"/>
-                </a:lnSpc>
-              </a:pPr>
-              <a:r>
-                <a:rPr lang="en-US" sz="1125">
-                  <a:solidFill>
-                    <a:srgbClr val="8590B3"/>
-                  </a:solidFill>
-                  <a:latin typeface="JetBrains Mono"/>
-                  <a:ea typeface="JetBrains Mono"/>
-                  <a:cs typeface="JetBrains Mono"/>
-                  <a:sym typeface="JetBrains Mono"/>
-                </a:rPr>
-                <a:t>02/13</a:t>
-              </a:r>
-            </a:p>
-          </p:txBody>
-        </p:sp>
-      </p:grpSp>
-      <p:grpSp>
-        <p:nvGrpSpPr>
-          <p:cNvPr id="21" name="Group 21"/>
-          <p:cNvGrpSpPr/>
-          <p:nvPr/>
-        </p:nvGrpSpPr>
-        <p:grpSpPr>
-          <a:xfrm>
-            <a:off x="754971" y="2580675"/>
-            <a:ext cx="16791899" cy="6364666"/>
-            <a:chOff x="0" y="0"/>
-            <a:chExt cx="21230666" cy="8047101"/>
-          </a:xfrm>
-        </p:grpSpPr>
-        <p:sp>
-          <p:nvSpPr>
-            <p:cNvPr id="22" name="Freeform 22" descr="/Users/hstrauss/Documents/GitHub/belvedere-pm/output/deck-rebuild/illus/bottleneck.png"/>
-            <p:cNvSpPr/>
-            <p:nvPr/>
-          </p:nvSpPr>
-          <p:spPr>
-            <a:xfrm>
-              <a:off x="0" y="0"/>
-              <a:ext cx="21230717" cy="8047101"/>
-            </a:xfrm>
-            <a:custGeom>
-              <a:avLst/>
-              <a:gdLst/>
-              <a:ahLst/>
-              <a:cxnLst/>
-              <a:rect l="l" t="t" r="r" b="b"/>
-              <a:pathLst>
-                <a:path w="21230717" h="8047101">
-                  <a:moveTo>
-                    <a:pt x="0" y="0"/>
-                  </a:moveTo>
-                  <a:lnTo>
-                    <a:pt x="21230717" y="0"/>
-                  </a:lnTo>
-                  <a:lnTo>
-                    <a:pt x="21230717" y="8047101"/>
-                  </a:lnTo>
-                  <a:lnTo>
-                    <a:pt x="0" y="8047101"/>
-                  </a:lnTo>
-                  <a:lnTo>
-                    <a:pt x="0" y="0"/>
-                  </a:lnTo>
-                  <a:close/>
-                </a:path>
-              </a:pathLst>
-            </a:custGeom>
-            <a:blipFill>
-              <a:blip r:embed="rId5"/>
-              <a:stretch>
-                <a:fillRect/>
-              </a:stretch>
-            </a:blipFill>
-          </p:spPr>
-          <p:txBody>
-            <a:bodyPr/>
-            <a:lstStyle/>
-            <a:p>
-              <a:endParaRPr lang="en-US"/>
-            </a:p>
-          </p:txBody>
-        </p:sp>
-      </p:grpSp>
-      <p:grpSp>
-        <p:nvGrpSpPr>
-          <p:cNvPr id="23" name="Group 23"/>
-          <p:cNvGrpSpPr/>
-          <p:nvPr/>
-        </p:nvGrpSpPr>
-        <p:grpSpPr>
-          <a:xfrm>
-            <a:off x="459946" y="2450237"/>
-            <a:ext cx="17381948" cy="7114027"/>
-            <a:chOff x="0" y="0"/>
-            <a:chExt cx="21230666" cy="8689219"/>
-          </a:xfrm>
-        </p:grpSpPr>
-        <p:sp>
-          <p:nvSpPr>
-            <p:cNvPr id="24" name="Freeform 24" descr="/Users/hstrauss/Documents/GitHub/belvedere-pm/output/deck-rebuild/illus/bottleneck.png"/>
-            <p:cNvSpPr/>
-            <p:nvPr/>
-          </p:nvSpPr>
-          <p:spPr>
-            <a:xfrm>
-              <a:off x="0" y="0"/>
-              <a:ext cx="21230717" cy="8689173"/>
-            </a:xfrm>
-            <a:custGeom>
-              <a:avLst/>
-              <a:gdLst/>
-              <a:ahLst/>
-              <a:cxnLst/>
-              <a:rect l="l" t="t" r="r" b="b"/>
-              <a:pathLst>
-                <a:path w="21230717" h="8689173">
-                  <a:moveTo>
-                    <a:pt x="0" y="0"/>
-                  </a:moveTo>
-                  <a:lnTo>
-                    <a:pt x="21230717" y="0"/>
-                  </a:lnTo>
-                  <a:lnTo>
-                    <a:pt x="21230717" y="8689173"/>
-                  </a:lnTo>
-                  <a:lnTo>
-                    <a:pt x="0" y="8689173"/>
-                  </a:lnTo>
-                  <a:lnTo>
-                    <a:pt x="0" y="0"/>
-                  </a:lnTo>
-                  <a:close/>
-                </a:path>
-              </a:pathLst>
-            </a:custGeom>
-            <a:blipFill>
-              <a:blip r:embed="rId6"/>
-              <a:stretch>
-                <a:fillRect t="-5172" b="-5172"/>
-              </a:stretch>
-            </a:blipFill>
-          </p:spPr>
-          <p:txBody>
-            <a:bodyPr/>
-            <a:lstStyle/>
-            <a:p>
-              <a:endParaRPr lang="en-US"/>
-            </a:p>
-          </p:txBody>
-        </p:sp>
-      </p:grpSp>
-    </p:spTree>
-  </p:cSld>
-  <p:clrMapOvr>
-    <a:masterClrMapping/>
-  </p:clrMapOvr>
-</p:sld>
-</file>
-
-<file path=ppt/slides/slide3.xml><?xml version="1.0" encoding="utf-8"?>
-<p:sld xmlns:a="http://schemas.openxmlformats.org/drawingml/2006/main" xmlns:r="http://schemas.openxmlformats.org/officeDocument/2006/relationships" xmlns:p="http://schemas.openxmlformats.org/presentationml/2006/main">
-  <p:cSld>
-    <p:bg>
-      <p:bgPr>
-        <a:solidFill>
-          <a:srgbClr val="081434"/>
-        </a:solidFill>
-        <a:effectLst/>
-      </p:bgPr>
-    </p:bg>
-    <p:spTree>
-      <p:nvGrpSpPr>
-        <p:cNvPr id="1" name=""/>
-        <p:cNvGrpSpPr/>
-        <p:nvPr/>
-      </p:nvGrpSpPr>
-      <p:grpSpPr>
-        <a:xfrm>
-          <a:off x="0" y="0"/>
-          <a:ext cx="0" cy="0"/>
-          <a:chOff x="0" y="0"/>
-          <a:chExt cx="0" cy="0"/>
-        </a:xfrm>
-      </p:grpSpPr>
-      <p:grpSp>
-        <p:nvGrpSpPr>
-          <p:cNvPr id="2" name="Group 2"/>
-          <p:cNvGrpSpPr/>
-          <p:nvPr/>
-        </p:nvGrpSpPr>
-        <p:grpSpPr>
-          <a:xfrm>
-            <a:off x="754971" y="466706"/>
-            <a:ext cx="13040392" cy="411804"/>
-            <a:chOff x="0" y="0"/>
-            <a:chExt cx="17387189" cy="549072"/>
-          </a:xfrm>
-        </p:grpSpPr>
-        <p:sp>
-          <p:nvSpPr>
-            <p:cNvPr id="3" name="Freeform 3"/>
-            <p:cNvSpPr/>
-            <p:nvPr/>
-          </p:nvSpPr>
-          <p:spPr>
-            <a:xfrm>
-              <a:off x="0" y="0"/>
-              <a:ext cx="17387184" cy="549069"/>
-            </a:xfrm>
-            <a:custGeom>
-              <a:avLst/>
-              <a:gdLst/>
-              <a:ahLst/>
-              <a:cxnLst/>
-              <a:rect l="l" t="t" r="r" b="b"/>
-              <a:pathLst>
-                <a:path w="17387184" h="549069">
-                  <a:moveTo>
-                    <a:pt x="0" y="0"/>
-                  </a:moveTo>
-                  <a:lnTo>
-                    <a:pt x="17387184" y="0"/>
-                  </a:lnTo>
-                  <a:lnTo>
-                    <a:pt x="17387184" y="549069"/>
-                  </a:lnTo>
-                  <a:lnTo>
-                    <a:pt x="0" y="549069"/>
-                  </a:lnTo>
-                  <a:close/>
-                </a:path>
-              </a:pathLst>
-            </a:custGeom>
-            <a:blipFill>
-              <a:blip r:embed="rId3">
-                <a:alphaModFix amt="0"/>
-              </a:blip>
-              <a:stretch>
-                <a:fillRect t="-567026" b="-567026"/>
-              </a:stretch>
-            </a:blipFill>
-          </p:spPr>
-          <p:txBody>
-            <a:bodyPr/>
-            <a:lstStyle/>
-            <a:p>
-              <a:endParaRPr lang="en-US"/>
-            </a:p>
-          </p:txBody>
-        </p:sp>
-        <p:sp>
-          <p:nvSpPr>
-            <p:cNvPr id="4" name="TextBox 4"/>
-            <p:cNvSpPr txBox="1"/>
-            <p:nvPr/>
-          </p:nvSpPr>
-          <p:spPr>
-            <a:xfrm>
-              <a:off x="0" y="-9525"/>
-              <a:ext cx="17387189" cy="558597"/>
-            </a:xfrm>
-            <a:prstGeom prst="rect">
-              <a:avLst/>
-            </a:prstGeom>
-          </p:spPr>
-          <p:txBody>
-            <a:bodyPr lIns="0" tIns="0" rIns="0" bIns="0" rtlCol="0" anchor="ctr"/>
-            <a:lstStyle/>
-            <a:p>
-              <a:pPr algn="l">
-                <a:lnSpc>
-                  <a:spcPts val="1801"/>
-                </a:lnSpc>
-              </a:pPr>
-              <a:r>
-                <a:rPr lang="en-US" sz="1501" spc="375" dirty="0">
-                  <a:solidFill>
-                    <a:srgbClr val="FFF2C2"/>
-                  </a:solidFill>
-                  <a:latin typeface="JetBrains Mono"/>
-                  <a:ea typeface="JetBrains Mono"/>
-                  <a:cs typeface="JetBrains Mono"/>
-                  <a:sym typeface="JetBrains Mono"/>
-                </a:rPr>
-                <a:t>THE AGE-OLD PROBLEM</a:t>
-              </a:r>
-            </a:p>
-          </p:txBody>
-        </p:sp>
-      </p:grpSp>
-      <p:grpSp>
-        <p:nvGrpSpPr>
-          <p:cNvPr id="5" name="Group 5"/>
-          <p:cNvGrpSpPr/>
-          <p:nvPr/>
-        </p:nvGrpSpPr>
-        <p:grpSpPr>
-          <a:xfrm>
-            <a:off x="713794" y="796147"/>
-            <a:ext cx="15511196" cy="851057"/>
-            <a:chOff x="0" y="0"/>
-            <a:chExt cx="20681594" cy="1134743"/>
-          </a:xfrm>
-        </p:grpSpPr>
-        <p:sp>
-          <p:nvSpPr>
-            <p:cNvPr id="6" name="Freeform 6"/>
-            <p:cNvSpPr/>
-            <p:nvPr/>
-          </p:nvSpPr>
-          <p:spPr>
-            <a:xfrm>
-              <a:off x="0" y="0"/>
-              <a:ext cx="20681598" cy="1134740"/>
-            </a:xfrm>
-            <a:custGeom>
-              <a:avLst/>
-              <a:gdLst/>
-              <a:ahLst/>
-              <a:cxnLst/>
-              <a:rect l="l" t="t" r="r" b="b"/>
-              <a:pathLst>
-                <a:path w="20681598" h="1134740">
-                  <a:moveTo>
-                    <a:pt x="0" y="0"/>
-                  </a:moveTo>
-                  <a:lnTo>
-                    <a:pt x="20681598" y="0"/>
-                  </a:lnTo>
-                  <a:lnTo>
-                    <a:pt x="20681598" y="1134740"/>
-                  </a:lnTo>
-                  <a:lnTo>
-                    <a:pt x="0" y="1134740"/>
-                  </a:lnTo>
-                  <a:close/>
-                </a:path>
-              </a:pathLst>
-            </a:custGeom>
-            <a:blipFill>
-              <a:blip r:embed="rId3">
-                <a:alphaModFix amt="0"/>
-              </a:blip>
-              <a:stretch>
-                <a:fillRect t="-305131" b="-305131"/>
-              </a:stretch>
-            </a:blipFill>
-          </p:spPr>
-          <p:txBody>
-            <a:bodyPr/>
-            <a:lstStyle/>
-            <a:p>
-              <a:endParaRPr lang="en-US"/>
-            </a:p>
-          </p:txBody>
-        </p:sp>
-        <p:sp>
-          <p:nvSpPr>
-            <p:cNvPr id="7" name="TextBox 7"/>
-            <p:cNvSpPr txBox="1"/>
-            <p:nvPr/>
-          </p:nvSpPr>
-          <p:spPr>
-            <a:xfrm>
-              <a:off x="0" y="0"/>
-              <a:ext cx="20681594" cy="1134743"/>
-            </a:xfrm>
-            <a:prstGeom prst="rect">
-              <a:avLst/>
-            </a:prstGeom>
-          </p:spPr>
-          <p:txBody>
-            <a:bodyPr lIns="0" tIns="0" rIns="0" bIns="0" rtlCol="0" anchor="ctr"/>
-            <a:lstStyle/>
-            <a:p>
-              <a:pPr algn="l">
-                <a:lnSpc>
-                  <a:spcPts val="4683"/>
-                </a:lnSpc>
-              </a:pPr>
-              <a:r>
-                <a:rPr lang="en-US" sz="3903" b="1">
-                  <a:gradFill>
-                    <a:gsLst>
-                      <a:gs pos="0">
-                        <a:srgbClr val="FFFFFF">
-                          <a:alpha val="100000"/>
-                        </a:srgbClr>
-                      </a:gs>
-                      <a:gs pos="100000">
-                        <a:srgbClr val="FFF2C3">
-                          <a:alpha val="100000"/>
-                        </a:srgbClr>
-                      </a:gs>
-                    </a:gsLst>
-                    <a:lin ang="5400000"/>
-                  </a:gradFill>
-                  <a:latin typeface="Inter Bold"/>
-                  <a:ea typeface="Inter Bold"/>
-                  <a:cs typeface="Inter Bold"/>
-                  <a:sym typeface="Inter Bold"/>
-                </a:rPr>
-                <a:t>The Work Before the Work</a:t>
-              </a:r>
-            </a:p>
-          </p:txBody>
-        </p:sp>
-      </p:grpSp>
-      <p:grpSp>
-        <p:nvGrpSpPr>
-          <p:cNvPr id="8" name="Group 8"/>
-          <p:cNvGrpSpPr/>
-          <p:nvPr/>
-        </p:nvGrpSpPr>
-        <p:grpSpPr>
-          <a:xfrm>
-            <a:off x="16217002" y="466706"/>
-            <a:ext cx="1329867" cy="1386402"/>
-            <a:chOff x="0" y="0"/>
-            <a:chExt cx="1053363" cy="1098144"/>
-          </a:xfrm>
-        </p:grpSpPr>
-        <p:sp>
-          <p:nvSpPr>
-            <p:cNvPr id="9" name="Freeform 9" descr="/Users/hstrauss/Documents/GitHub/belvedere-pm/output/deck-rebuild/belv_mark.png"/>
-            <p:cNvSpPr/>
-            <p:nvPr/>
-          </p:nvSpPr>
-          <p:spPr>
-            <a:xfrm>
-              <a:off x="0" y="0"/>
-              <a:ext cx="1053338" cy="1098169"/>
-            </a:xfrm>
-            <a:custGeom>
-              <a:avLst/>
-              <a:gdLst/>
-              <a:ahLst/>
-              <a:cxnLst/>
-              <a:rect l="l" t="t" r="r" b="b"/>
-              <a:pathLst>
-                <a:path w="1053338" h="1098169">
-                  <a:moveTo>
-                    <a:pt x="0" y="0"/>
-                  </a:moveTo>
-                  <a:lnTo>
-                    <a:pt x="1053338" y="0"/>
-                  </a:lnTo>
-                  <a:lnTo>
-                    <a:pt x="1053338" y="1098169"/>
-                  </a:lnTo>
-                  <a:lnTo>
-                    <a:pt x="0" y="1098169"/>
-                  </a:lnTo>
-                  <a:lnTo>
-                    <a:pt x="0" y="0"/>
-                  </a:lnTo>
-                  <a:close/>
-                </a:path>
-              </a:pathLst>
-            </a:custGeom>
-            <a:blipFill>
-              <a:blip r:embed="rId4"/>
-              <a:stretch>
-                <a:fillRect r="-2" b="2"/>
-              </a:stretch>
-            </a:blipFill>
-          </p:spPr>
-          <p:txBody>
-            <a:bodyPr/>
-            <a:lstStyle/>
-            <a:p>
-              <a:endParaRPr lang="en-US"/>
-            </a:p>
-          </p:txBody>
-        </p:sp>
-      </p:grpSp>
-      <p:grpSp>
-        <p:nvGrpSpPr>
-          <p:cNvPr id="10" name="Group 10"/>
-          <p:cNvGrpSpPr/>
-          <p:nvPr/>
-        </p:nvGrpSpPr>
-        <p:grpSpPr>
-          <a:xfrm>
-            <a:off x="727520" y="1619755"/>
-            <a:ext cx="16472068" cy="466706"/>
-            <a:chOff x="0" y="0"/>
-            <a:chExt cx="21962758" cy="622275"/>
-          </a:xfrm>
-        </p:grpSpPr>
-        <p:sp>
-          <p:nvSpPr>
-            <p:cNvPr id="11" name="Freeform 11"/>
-            <p:cNvSpPr/>
-            <p:nvPr/>
-          </p:nvSpPr>
-          <p:spPr>
-            <a:xfrm>
-              <a:off x="0" y="0"/>
-              <a:ext cx="21962759" cy="622278"/>
-            </a:xfrm>
-            <a:custGeom>
-              <a:avLst/>
-              <a:gdLst/>
-              <a:ahLst/>
-              <a:cxnLst/>
-              <a:rect l="l" t="t" r="r" b="b"/>
-              <a:pathLst>
-                <a:path w="21962759" h="622278">
-                  <a:moveTo>
-                    <a:pt x="0" y="0"/>
-                  </a:moveTo>
-                  <a:lnTo>
-                    <a:pt x="21962759" y="0"/>
-                  </a:lnTo>
-                  <a:lnTo>
-                    <a:pt x="21962759" y="622278"/>
-                  </a:lnTo>
-                  <a:lnTo>
-                    <a:pt x="0" y="622278"/>
-                  </a:lnTo>
-                  <a:close/>
-                </a:path>
-              </a:pathLst>
-            </a:custGeom>
-            <a:blipFill>
-              <a:blip r:embed="rId3">
-                <a:alphaModFix amt="0"/>
-              </a:blip>
-              <a:stretch>
-                <a:fillRect t="-637707" b="-637706"/>
-              </a:stretch>
-            </a:blipFill>
-          </p:spPr>
-          <p:txBody>
-            <a:bodyPr/>
-            <a:lstStyle/>
-            <a:p>
-              <a:endParaRPr lang="en-US"/>
-            </a:p>
-          </p:txBody>
-        </p:sp>
-        <p:sp>
-          <p:nvSpPr>
-            <p:cNvPr id="12" name="TextBox 12"/>
-            <p:cNvSpPr txBox="1"/>
-            <p:nvPr/>
-          </p:nvSpPr>
-          <p:spPr>
-            <a:xfrm>
-              <a:off x="0" y="-9525"/>
-              <a:ext cx="21962758" cy="631800"/>
-            </a:xfrm>
-            <a:prstGeom prst="rect">
-              <a:avLst/>
-            </a:prstGeom>
-          </p:spPr>
-          <p:txBody>
-            <a:bodyPr lIns="0" tIns="0" rIns="0" bIns="0" rtlCol="0" anchor="ctr"/>
-            <a:lstStyle/>
-            <a:p>
-              <a:pPr algn="l">
-                <a:lnSpc>
-                  <a:spcPts val="2341"/>
-                </a:lnSpc>
-              </a:pPr>
-              <a:r>
-                <a:rPr lang="en-US" sz="1951" dirty="0">
-                  <a:solidFill>
-                    <a:srgbClr val="9BA4BE"/>
-                  </a:solidFill>
-                  <a:latin typeface="Inter"/>
-                  <a:ea typeface="Inter"/>
-                  <a:cs typeface="Inter"/>
-                  <a:sym typeface="Inter"/>
-                </a:rPr>
-                <a:t>Data is dumb and doesn’t help you use it. A person must investigate by hand, every time.</a:t>
-              </a:r>
-            </a:p>
-          </p:txBody>
-        </p:sp>
-      </p:grpSp>
-      <p:grpSp>
-        <p:nvGrpSpPr>
-          <p:cNvPr id="13" name="Group 13"/>
-          <p:cNvGrpSpPr/>
-          <p:nvPr/>
-        </p:nvGrpSpPr>
-        <p:grpSpPr>
-          <a:xfrm>
-            <a:off x="754971" y="2168823"/>
-            <a:ext cx="16791899" cy="15097"/>
-            <a:chOff x="0" y="0"/>
-            <a:chExt cx="22389198" cy="20130"/>
-          </a:xfrm>
-        </p:grpSpPr>
-        <p:sp>
-          <p:nvSpPr>
-            <p:cNvPr id="14" name="Freeform 14"/>
-            <p:cNvSpPr/>
-            <p:nvPr/>
-          </p:nvSpPr>
-          <p:spPr>
-            <a:xfrm>
-              <a:off x="0" y="0"/>
-              <a:ext cx="22389212" cy="20193"/>
-            </a:xfrm>
-            <a:custGeom>
-              <a:avLst/>
-              <a:gdLst/>
-              <a:ahLst/>
-              <a:cxnLst/>
-              <a:rect l="l" t="t" r="r" b="b"/>
-              <a:pathLst>
-                <a:path w="22389212" h="20193">
-                  <a:moveTo>
-                    <a:pt x="0" y="0"/>
-                  </a:moveTo>
-                  <a:lnTo>
-                    <a:pt x="22389212" y="0"/>
-                  </a:lnTo>
-                  <a:lnTo>
-                    <a:pt x="22389212" y="20193"/>
-                  </a:lnTo>
-                  <a:lnTo>
-                    <a:pt x="0" y="20193"/>
-                  </a:lnTo>
-                  <a:close/>
-                </a:path>
-              </a:pathLst>
-            </a:custGeom>
-            <a:solidFill>
-              <a:srgbClr val="1A2D5A"/>
-            </a:solidFill>
-          </p:spPr>
-          <p:txBody>
-            <a:bodyPr/>
-            <a:lstStyle/>
-            <a:p>
-              <a:endParaRPr lang="en-US"/>
-            </a:p>
-          </p:txBody>
-        </p:sp>
-      </p:grpSp>
-      <p:grpSp>
-        <p:nvGrpSpPr>
-          <p:cNvPr id="15" name="Group 15"/>
-          <p:cNvGrpSpPr/>
-          <p:nvPr/>
-        </p:nvGrpSpPr>
-        <p:grpSpPr>
-          <a:xfrm>
-            <a:off x="0" y="9773431"/>
-            <a:ext cx="18301840" cy="343167"/>
-            <a:chOff x="0" y="0"/>
-            <a:chExt cx="24402453" cy="457556"/>
-          </a:xfrm>
-        </p:grpSpPr>
-        <p:sp>
-          <p:nvSpPr>
-            <p:cNvPr id="16" name="Freeform 16"/>
-            <p:cNvSpPr/>
-            <p:nvPr/>
-          </p:nvSpPr>
-          <p:spPr>
-            <a:xfrm>
-              <a:off x="0" y="0"/>
-              <a:ext cx="24402455" cy="457557"/>
-            </a:xfrm>
-            <a:custGeom>
-              <a:avLst/>
-              <a:gdLst/>
-              <a:ahLst/>
-              <a:cxnLst/>
-              <a:rect l="l" t="t" r="r" b="b"/>
-              <a:pathLst>
-                <a:path w="24402455" h="457557">
-                  <a:moveTo>
-                    <a:pt x="0" y="0"/>
-                  </a:moveTo>
-                  <a:lnTo>
-                    <a:pt x="24402455" y="0"/>
-                  </a:lnTo>
-                  <a:lnTo>
-                    <a:pt x="24402455" y="457557"/>
-                  </a:lnTo>
-                  <a:lnTo>
-                    <a:pt x="0" y="457557"/>
-                  </a:lnTo>
-                  <a:close/>
-                </a:path>
-              </a:pathLst>
-            </a:custGeom>
-            <a:blipFill>
-              <a:blip r:embed="rId3">
-                <a:alphaModFix amt="0"/>
-              </a:blip>
-              <a:stretch>
-                <a:fillRect t="-989176" b="-989175"/>
-              </a:stretch>
-            </a:blipFill>
-          </p:spPr>
-          <p:txBody>
-            <a:bodyPr/>
-            <a:lstStyle/>
-            <a:p>
-              <a:endParaRPr lang="en-US"/>
-            </a:p>
-          </p:txBody>
-        </p:sp>
-        <p:sp>
-          <p:nvSpPr>
-            <p:cNvPr id="17" name="TextBox 17"/>
-            <p:cNvSpPr txBox="1"/>
-            <p:nvPr/>
-          </p:nvSpPr>
-          <p:spPr>
-            <a:xfrm>
-              <a:off x="0" y="0"/>
-              <a:ext cx="24402453" cy="457556"/>
-            </a:xfrm>
-            <a:prstGeom prst="rect">
-              <a:avLst/>
-            </a:prstGeom>
-          </p:spPr>
-          <p:txBody>
-            <a:bodyPr lIns="0" tIns="0" rIns="0" bIns="0" rtlCol="0" anchor="ctr"/>
-            <a:lstStyle/>
-            <a:p>
-              <a:pPr algn="ctr">
-                <a:lnSpc>
-                  <a:spcPts val="1351"/>
-                </a:lnSpc>
-              </a:pPr>
-              <a:r>
-                <a:rPr lang="en-US" sz="1125" spc="450">
-                  <a:solidFill>
-                    <a:srgbClr val="8590B3"/>
-                  </a:solidFill>
-                  <a:latin typeface="JetBrains Mono"/>
-                  <a:ea typeface="JetBrains Mono"/>
-                  <a:cs typeface="JetBrains Mono"/>
-                  <a:sym typeface="JetBrains Mono"/>
-                </a:rPr>
-                <a:t>CLEARFRACTURE.AI</a:t>
-              </a:r>
-            </a:p>
-          </p:txBody>
-        </p:sp>
-      </p:grpSp>
-      <p:grpSp>
-        <p:nvGrpSpPr>
-          <p:cNvPr id="18" name="Group 18"/>
-          <p:cNvGrpSpPr/>
-          <p:nvPr/>
-        </p:nvGrpSpPr>
-        <p:grpSpPr>
-          <a:xfrm>
-            <a:off x="17135065" y="9773431"/>
-            <a:ext cx="823608" cy="343168"/>
-            <a:chOff x="0" y="0"/>
-            <a:chExt cx="1098144" cy="457557"/>
-          </a:xfrm>
-        </p:grpSpPr>
-        <p:sp>
-          <p:nvSpPr>
-            <p:cNvPr id="19" name="Freeform 19"/>
-            <p:cNvSpPr/>
-            <p:nvPr/>
-          </p:nvSpPr>
-          <p:spPr>
-            <a:xfrm>
-              <a:off x="0" y="0"/>
-              <a:ext cx="1098138" cy="457559"/>
-            </a:xfrm>
-            <a:custGeom>
-              <a:avLst/>
-              <a:gdLst/>
-              <a:ahLst/>
-              <a:cxnLst/>
-              <a:rect l="l" t="t" r="r" b="b"/>
-              <a:pathLst>
-                <a:path w="1098138" h="457559">
-                  <a:moveTo>
-                    <a:pt x="0" y="0"/>
-                  </a:moveTo>
-                  <a:lnTo>
-                    <a:pt x="1098138" y="0"/>
-                  </a:lnTo>
-                  <a:lnTo>
-                    <a:pt x="1098138" y="457559"/>
-                  </a:lnTo>
-                  <a:lnTo>
-                    <a:pt x="0" y="457559"/>
-                  </a:lnTo>
-                  <a:close/>
-                </a:path>
-              </a:pathLst>
-            </a:custGeom>
-            <a:blipFill>
-              <a:blip r:embed="rId3">
-                <a:alphaModFix amt="0"/>
-              </a:blip>
-              <a:stretch>
-                <a:fillRect l="-3459" r="-3459"/>
-              </a:stretch>
-            </a:blipFill>
-          </p:spPr>
-          <p:txBody>
-            <a:bodyPr/>
-            <a:lstStyle/>
-            <a:p>
-              <a:endParaRPr lang="en-US"/>
-            </a:p>
-          </p:txBody>
-        </p:sp>
-        <p:sp>
-          <p:nvSpPr>
-            <p:cNvPr id="20" name="TextBox 20"/>
-            <p:cNvSpPr txBox="1"/>
-            <p:nvPr/>
-          </p:nvSpPr>
-          <p:spPr>
-            <a:xfrm>
-              <a:off x="0" y="0"/>
-              <a:ext cx="1098144" cy="457557"/>
-            </a:xfrm>
-            <a:prstGeom prst="rect">
-              <a:avLst/>
-            </a:prstGeom>
-          </p:spPr>
-          <p:txBody>
-            <a:bodyPr lIns="0" tIns="0" rIns="0" bIns="0" rtlCol="0" anchor="ctr"/>
-            <a:lstStyle/>
-            <a:p>
-              <a:pPr algn="r">
-                <a:lnSpc>
-                  <a:spcPts val="1351"/>
-                </a:lnSpc>
-              </a:pPr>
-              <a:r>
-                <a:rPr lang="en-US" sz="1125">
-                  <a:solidFill>
-                    <a:srgbClr val="8590B3"/>
-                  </a:solidFill>
-                  <a:latin typeface="JetBrains Mono"/>
-                  <a:ea typeface="JetBrains Mono"/>
-                  <a:cs typeface="JetBrains Mono"/>
-                  <a:sym typeface="JetBrains Mono"/>
-                </a:rPr>
-                <a:t>03/13</a:t>
-              </a:r>
-            </a:p>
-          </p:txBody>
-        </p:sp>
-      </p:grpSp>
-      <p:grpSp>
-        <p:nvGrpSpPr>
-          <p:cNvPr id="23" name="Group 23"/>
-          <p:cNvGrpSpPr/>
-          <p:nvPr/>
-        </p:nvGrpSpPr>
-        <p:grpSpPr>
-          <a:xfrm>
-            <a:off x="754971" y="7539023"/>
-            <a:ext cx="3947241" cy="768847"/>
-            <a:chOff x="0" y="0"/>
-            <a:chExt cx="1039603" cy="202495"/>
-          </a:xfrm>
-        </p:grpSpPr>
-        <p:sp>
-          <p:nvSpPr>
-            <p:cNvPr id="24" name="Freeform 24"/>
-            <p:cNvSpPr/>
-            <p:nvPr/>
-          </p:nvSpPr>
-          <p:spPr>
-            <a:xfrm>
-              <a:off x="0" y="0"/>
-              <a:ext cx="1039603" cy="202495"/>
-            </a:xfrm>
-            <a:custGeom>
-              <a:avLst/>
-              <a:gdLst/>
-              <a:ahLst/>
-              <a:cxnLst/>
-              <a:rect l="l" t="t" r="r" b="b"/>
-              <a:pathLst>
-                <a:path w="1039603" h="202495">
-                  <a:moveTo>
-                    <a:pt x="0" y="0"/>
-                  </a:moveTo>
-                  <a:lnTo>
-                    <a:pt x="1039603" y="0"/>
-                  </a:lnTo>
-                  <a:lnTo>
-                    <a:pt x="1039603" y="202495"/>
-                  </a:lnTo>
-                  <a:lnTo>
-                    <a:pt x="0" y="202495"/>
-                  </a:lnTo>
-                  <a:close/>
-                </a:path>
-              </a:pathLst>
-            </a:custGeom>
-            <a:solidFill>
-              <a:srgbClr val="081434"/>
-            </a:solidFill>
-          </p:spPr>
-          <p:txBody>
-            <a:bodyPr/>
-            <a:lstStyle/>
-            <a:p>
-              <a:endParaRPr lang="en-US"/>
-            </a:p>
-          </p:txBody>
-        </p:sp>
-        <p:sp>
-          <p:nvSpPr>
-            <p:cNvPr id="25" name="TextBox 25"/>
-            <p:cNvSpPr txBox="1"/>
-            <p:nvPr/>
-          </p:nvSpPr>
-          <p:spPr>
-            <a:xfrm>
-              <a:off x="0" y="-9525"/>
-              <a:ext cx="1039603" cy="212020"/>
-            </a:xfrm>
-            <a:prstGeom prst="rect">
-              <a:avLst/>
-            </a:prstGeom>
-          </p:spPr>
-          <p:txBody>
-            <a:bodyPr lIns="50800" tIns="50800" rIns="50800" bIns="50800" rtlCol="0" anchor="ctr"/>
-            <a:lstStyle/>
-            <a:p>
-              <a:pPr algn="ctr">
-                <a:lnSpc>
-                  <a:spcPts val="1801"/>
-                </a:lnSpc>
-              </a:pPr>
-              <a:endParaRPr/>
-            </a:p>
-          </p:txBody>
-        </p:sp>
-      </p:grpSp>
-      <p:pic>
-        <p:nvPicPr>
-          <p:cNvPr id="27" name="Picture 26">
-            <a:extLst>
-              <a:ext uri="{FF2B5EF4-FFF2-40B4-BE49-F238E27FC236}">
-                <a16:creationId xmlns:a16="http://schemas.microsoft.com/office/drawing/2014/main" id="{17AC541E-F3C7-D446-F0E5-C4133FFA7F77}"/>
-              </a:ext>
-            </a:extLst>
-          </p:cNvPr>
-          <p:cNvPicPr>
-            <a:picLocks noChangeAspect="1"/>
-          </p:cNvPicPr>
-          <p:nvPr/>
-        </p:nvPicPr>
-        <p:blipFill>
-          <a:blip r:embed="rId5"/>
-          <a:stretch>
-            <a:fillRect/>
-          </a:stretch>
-        </p:blipFill>
-        <p:spPr>
-          <a:xfrm>
-            <a:off x="304800" y="2499650"/>
-            <a:ext cx="17882489" cy="6775787"/>
-          </a:xfrm>
-          <a:prstGeom prst="rect">
-            <a:avLst/>
-          </a:prstGeom>
-        </p:spPr>
-      </p:pic>
-    </p:spTree>
-  </p:cSld>
-  <p:clrMapOvr>
-    <a:masterClrMapping/>
-  </p:clrMapOvr>
-</p:sld>
-</file>
-
-<file path=ppt/slides/slide4.xml><?xml version="1.0" encoding="utf-8"?>
-<p:sld xmlns:a="http://schemas.openxmlformats.org/drawingml/2006/main" xmlns:r="http://schemas.openxmlformats.org/officeDocument/2006/relationships" xmlns:p="http://schemas.openxmlformats.org/presentationml/2006/main">
-  <p:cSld>
-    <p:bg>
-      <p:bgPr>
-        <a:solidFill>
-          <a:srgbClr val="081434"/>
-        </a:solidFill>
-        <a:effectLst/>
-      </p:bgPr>
-    </p:bg>
-    <p:spTree>
-      <p:nvGrpSpPr>
         <p:cNvPr id="1" name="">
           <a:extLst>
             <a:ext uri="{FF2B5EF4-FFF2-40B4-BE49-F238E27FC236}">
@@ -8457,10 +6572,10 @@
       </p:grpSp>
       <p:pic>
         <p:nvPicPr>
-          <p:cNvPr id="22" name="Picture 21">
+          <p:cNvPr id="28" name="Picture 27">
             <a:extLst>
               <a:ext uri="{FF2B5EF4-FFF2-40B4-BE49-F238E27FC236}">
-                <a16:creationId xmlns:a16="http://schemas.microsoft.com/office/drawing/2014/main" id="{84BF72D3-F711-3EAD-DA38-18F07F3B287E}"/>
+                <a16:creationId xmlns:a16="http://schemas.microsoft.com/office/drawing/2014/main" id="{6125B57C-BC3E-BC16-2259-E7776B752188}"/>
               </a:ext>
             </a:extLst>
           </p:cNvPr>
@@ -8470,15 +6585,237 @@
           <p:nvPr/>
         </p:nvPicPr>
         <p:blipFill>
-          <a:blip r:embed="rId5"/>
+          <a:blip r:embed="rId5">
+            <a:clrChange>
+              <a:clrFrom>
+                <a:srgbClr val="030E2A"/>
+              </a:clrFrom>
+              <a:clrTo>
+                <a:srgbClr val="030E2A">
+                  <a:alpha val="0"/>
+                </a:srgbClr>
+              </a:clrTo>
+            </a:clrChange>
+          </a:blip>
+          <a:srcRect l="846" t="10717" r="74304" b="64270"/>
           <a:stretch>
             <a:fillRect/>
           </a:stretch>
         </p:blipFill>
         <p:spPr>
           <a:xfrm>
-            <a:off x="457200" y="2458797"/>
-            <a:ext cx="17275878" cy="6545938"/>
+            <a:off x="754971" y="2964811"/>
+            <a:ext cx="4274229" cy="1630145"/>
+          </a:xfrm>
+          <a:prstGeom prst="rect">
+            <a:avLst/>
+          </a:prstGeom>
+        </p:spPr>
+      </p:pic>
+      <p:pic>
+        <p:nvPicPr>
+          <p:cNvPr id="30" name="Picture 29">
+            <a:extLst>
+              <a:ext uri="{FF2B5EF4-FFF2-40B4-BE49-F238E27FC236}">
+                <a16:creationId xmlns:a16="http://schemas.microsoft.com/office/drawing/2014/main" id="{1B18A666-BEA1-E17F-E5F2-B760E308B763}"/>
+              </a:ext>
+            </a:extLst>
+          </p:cNvPr>
+          <p:cNvPicPr>
+            <a:picLocks noChangeAspect="1"/>
+          </p:cNvPicPr>
+          <p:nvPr/>
+        </p:nvPicPr>
+        <p:blipFill>
+          <a:blip r:embed="rId5">
+            <a:clrChange>
+              <a:clrFrom>
+                <a:srgbClr val="04102A"/>
+              </a:clrFrom>
+              <a:clrTo>
+                <a:srgbClr val="04102A">
+                  <a:alpha val="0"/>
+                </a:srgbClr>
+              </a:clrTo>
+            </a:clrChange>
+          </a:blip>
+          <a:srcRect l="886" t="35650" r="74264" b="39337"/>
+          <a:stretch>
+            <a:fillRect/>
+          </a:stretch>
+        </p:blipFill>
+        <p:spPr>
+          <a:xfrm>
+            <a:off x="713794" y="4631121"/>
+            <a:ext cx="4274230" cy="1630145"/>
+          </a:xfrm>
+          <a:prstGeom prst="rect">
+            <a:avLst/>
+          </a:prstGeom>
+        </p:spPr>
+      </p:pic>
+      <p:pic>
+        <p:nvPicPr>
+          <p:cNvPr id="32" name="Picture 31">
+            <a:extLst>
+              <a:ext uri="{FF2B5EF4-FFF2-40B4-BE49-F238E27FC236}">
+                <a16:creationId xmlns:a16="http://schemas.microsoft.com/office/drawing/2014/main" id="{5CFFA94F-B23B-14B6-D772-F0260418F400}"/>
+              </a:ext>
+            </a:extLst>
+          </p:cNvPr>
+          <p:cNvPicPr>
+            <a:picLocks noChangeAspect="1"/>
+          </p:cNvPicPr>
+          <p:nvPr/>
+        </p:nvPicPr>
+        <p:blipFill>
+          <a:blip r:embed="rId5">
+            <a:clrChange>
+              <a:clrFrom>
+                <a:srgbClr val="030F29"/>
+              </a:clrFrom>
+              <a:clrTo>
+                <a:srgbClr val="030F29">
+                  <a:alpha val="0"/>
+                </a:srgbClr>
+              </a:clrTo>
+            </a:clrChange>
+          </a:blip>
+          <a:srcRect l="846" t="64967" r="74304" b="1127"/>
+          <a:stretch>
+            <a:fillRect/>
+          </a:stretch>
+        </p:blipFill>
+        <p:spPr>
+          <a:xfrm>
+            <a:off x="713793" y="6329286"/>
+            <a:ext cx="4274231" cy="2209801"/>
+          </a:xfrm>
+          <a:prstGeom prst="rect">
+            <a:avLst/>
+          </a:prstGeom>
+        </p:spPr>
+      </p:pic>
+      <p:pic>
+        <p:nvPicPr>
+          <p:cNvPr id="34" name="Picture 33">
+            <a:extLst>
+              <a:ext uri="{FF2B5EF4-FFF2-40B4-BE49-F238E27FC236}">
+                <a16:creationId xmlns:a16="http://schemas.microsoft.com/office/drawing/2014/main" id="{EE6A6A13-2F27-D252-3D01-2F1BC73A541A}"/>
+              </a:ext>
+            </a:extLst>
+          </p:cNvPr>
+          <p:cNvPicPr>
+            <a:picLocks noChangeAspect="1"/>
+          </p:cNvPicPr>
+          <p:nvPr/>
+        </p:nvPicPr>
+        <p:blipFill>
+          <a:blip r:embed="rId5">
+            <a:clrChange>
+              <a:clrFrom>
+                <a:srgbClr val="030F29"/>
+              </a:clrFrom>
+              <a:clrTo>
+                <a:srgbClr val="030F29">
+                  <a:alpha val="0"/>
+                </a:srgbClr>
+              </a:clrTo>
+            </a:clrChange>
+          </a:blip>
+          <a:srcRect l="25694" t="10440" r="50826" b="1394"/>
+          <a:stretch>
+            <a:fillRect/>
+          </a:stretch>
+        </p:blipFill>
+        <p:spPr>
+          <a:xfrm>
+            <a:off x="5001471" y="2962700"/>
+            <a:ext cx="4038600" cy="5746123"/>
+          </a:xfrm>
+          <a:prstGeom prst="rect">
+            <a:avLst/>
+          </a:prstGeom>
+        </p:spPr>
+      </p:pic>
+      <p:pic>
+        <p:nvPicPr>
+          <p:cNvPr id="36" name="Picture 35">
+            <a:extLst>
+              <a:ext uri="{FF2B5EF4-FFF2-40B4-BE49-F238E27FC236}">
+                <a16:creationId xmlns:a16="http://schemas.microsoft.com/office/drawing/2014/main" id="{8B4520A9-84EF-C6EB-268E-37AA73ECE6E9}"/>
+              </a:ext>
+            </a:extLst>
+          </p:cNvPr>
+          <p:cNvPicPr>
+            <a:picLocks noChangeAspect="1"/>
+          </p:cNvPicPr>
+          <p:nvPr/>
+        </p:nvPicPr>
+        <p:blipFill>
+          <a:blip r:embed="rId5">
+            <a:clrChange>
+              <a:clrFrom>
+                <a:srgbClr val="010F2A"/>
+              </a:clrFrom>
+              <a:clrTo>
+                <a:srgbClr val="010F2A">
+                  <a:alpha val="0"/>
+                </a:srgbClr>
+              </a:clrTo>
+            </a:clrChange>
+          </a:blip>
+          <a:srcRect l="50947" t="10903" r="25130" b="1394"/>
+          <a:stretch>
+            <a:fillRect/>
+          </a:stretch>
+        </p:blipFill>
+        <p:spPr>
+          <a:xfrm>
+            <a:off x="9024831" y="2992987"/>
+            <a:ext cx="4114799" cy="5715836"/>
+          </a:xfrm>
+          <a:prstGeom prst="rect">
+            <a:avLst/>
+          </a:prstGeom>
+        </p:spPr>
+      </p:pic>
+      <p:pic>
+        <p:nvPicPr>
+          <p:cNvPr id="38" name="Picture 37">
+            <a:extLst>
+              <a:ext uri="{FF2B5EF4-FFF2-40B4-BE49-F238E27FC236}">
+                <a16:creationId xmlns:a16="http://schemas.microsoft.com/office/drawing/2014/main" id="{C0BA536C-25EA-DC66-EFAA-5637FE2AEB50}"/>
+              </a:ext>
+            </a:extLst>
+          </p:cNvPr>
+          <p:cNvPicPr>
+            <a:picLocks noChangeAspect="1"/>
+          </p:cNvPicPr>
+          <p:nvPr/>
+        </p:nvPicPr>
+        <p:blipFill>
+          <a:blip r:embed="rId5">
+            <a:clrChange>
+              <a:clrFrom>
+                <a:srgbClr val="020D29"/>
+              </a:clrFrom>
+              <a:clrTo>
+                <a:srgbClr val="020D29">
+                  <a:alpha val="0"/>
+                </a:srgbClr>
+              </a:clrTo>
+            </a:clrChange>
+          </a:blip>
+          <a:srcRect l="74627" t="39722" r="523" b="1586"/>
+          <a:stretch>
+            <a:fillRect/>
+          </a:stretch>
+        </p:blipFill>
+        <p:spPr>
+          <a:xfrm>
+            <a:off x="13063431" y="3009900"/>
+            <a:ext cx="4274231" cy="3825171"/>
           </a:xfrm>
           <a:prstGeom prst="rect">
             <a:avLst/>
@@ -8498,7 +6835,832 @@
 </p:sld>
 </file>
 
-<file path=ppt/slides/slide5.xml><?xml version="1.0" encoding="utf-8"?>
+<file path=ppt/slides/slide3.xml><?xml version="1.0" encoding="utf-8"?>
+<p:sld xmlns:a="http://schemas.openxmlformats.org/drawingml/2006/main" xmlns:r="http://schemas.openxmlformats.org/officeDocument/2006/relationships" xmlns:p="http://schemas.openxmlformats.org/presentationml/2006/main">
+  <p:cSld>
+    <p:bg>
+      <p:bgPr>
+        <a:solidFill>
+          <a:srgbClr val="081434"/>
+        </a:solidFill>
+        <a:effectLst/>
+      </p:bgPr>
+    </p:bg>
+    <p:spTree>
+      <p:nvGrpSpPr>
+        <p:cNvPr id="1" name=""/>
+        <p:cNvGrpSpPr/>
+        <p:nvPr/>
+      </p:nvGrpSpPr>
+      <p:grpSpPr>
+        <a:xfrm>
+          <a:off x="0" y="0"/>
+          <a:ext cx="0" cy="0"/>
+          <a:chOff x="0" y="0"/>
+          <a:chExt cx="0" cy="0"/>
+        </a:xfrm>
+      </p:grpSpPr>
+      <p:grpSp>
+        <p:nvGrpSpPr>
+          <p:cNvPr id="2" name="Group 2"/>
+          <p:cNvGrpSpPr/>
+          <p:nvPr/>
+        </p:nvGrpSpPr>
+        <p:grpSpPr>
+          <a:xfrm>
+            <a:off x="754971" y="466706"/>
+            <a:ext cx="13040392" cy="411804"/>
+            <a:chOff x="0" y="0"/>
+            <a:chExt cx="17387189" cy="549072"/>
+          </a:xfrm>
+        </p:grpSpPr>
+        <p:sp>
+          <p:nvSpPr>
+            <p:cNvPr id="3" name="Freeform 3"/>
+            <p:cNvSpPr/>
+            <p:nvPr/>
+          </p:nvSpPr>
+          <p:spPr>
+            <a:xfrm>
+              <a:off x="0" y="0"/>
+              <a:ext cx="17387184" cy="549069"/>
+            </a:xfrm>
+            <a:custGeom>
+              <a:avLst/>
+              <a:gdLst/>
+              <a:ahLst/>
+              <a:cxnLst/>
+              <a:rect l="l" t="t" r="r" b="b"/>
+              <a:pathLst>
+                <a:path w="17387184" h="549069">
+                  <a:moveTo>
+                    <a:pt x="0" y="0"/>
+                  </a:moveTo>
+                  <a:lnTo>
+                    <a:pt x="17387184" y="0"/>
+                  </a:lnTo>
+                  <a:lnTo>
+                    <a:pt x="17387184" y="549069"/>
+                  </a:lnTo>
+                  <a:lnTo>
+                    <a:pt x="0" y="549069"/>
+                  </a:lnTo>
+                  <a:close/>
+                </a:path>
+              </a:pathLst>
+            </a:custGeom>
+            <a:blipFill>
+              <a:blip r:embed="rId3">
+                <a:alphaModFix amt="0"/>
+              </a:blip>
+              <a:stretch>
+                <a:fillRect t="-567026" b="-567026"/>
+              </a:stretch>
+            </a:blipFill>
+          </p:spPr>
+          <p:txBody>
+            <a:bodyPr/>
+            <a:lstStyle/>
+            <a:p>
+              <a:endParaRPr lang="en-US"/>
+            </a:p>
+          </p:txBody>
+        </p:sp>
+        <p:sp>
+          <p:nvSpPr>
+            <p:cNvPr id="4" name="TextBox 4"/>
+            <p:cNvSpPr txBox="1"/>
+            <p:nvPr/>
+          </p:nvSpPr>
+          <p:spPr>
+            <a:xfrm>
+              <a:off x="0" y="-9525"/>
+              <a:ext cx="17387189" cy="558597"/>
+            </a:xfrm>
+            <a:prstGeom prst="rect">
+              <a:avLst/>
+            </a:prstGeom>
+          </p:spPr>
+          <p:txBody>
+            <a:bodyPr lIns="0" tIns="0" rIns="0" bIns="0" rtlCol="0" anchor="ctr"/>
+            <a:lstStyle/>
+            <a:p>
+              <a:pPr algn="l">
+                <a:lnSpc>
+                  <a:spcPts val="1801"/>
+                </a:lnSpc>
+              </a:pPr>
+              <a:r>
+                <a:rPr lang="en-US" sz="1501" spc="375" dirty="0">
+                  <a:solidFill>
+                    <a:srgbClr val="FFF2C2"/>
+                  </a:solidFill>
+                  <a:latin typeface="JetBrains Mono"/>
+                  <a:ea typeface="JetBrains Mono"/>
+                  <a:cs typeface="JetBrains Mono"/>
+                  <a:sym typeface="JetBrains Mono"/>
+                </a:rPr>
+                <a:t>THE AGE-OLD PROBLEM</a:t>
+              </a:r>
+            </a:p>
+          </p:txBody>
+        </p:sp>
+      </p:grpSp>
+      <p:grpSp>
+        <p:nvGrpSpPr>
+          <p:cNvPr id="5" name="Group 5"/>
+          <p:cNvGrpSpPr/>
+          <p:nvPr/>
+        </p:nvGrpSpPr>
+        <p:grpSpPr>
+          <a:xfrm>
+            <a:off x="713794" y="796147"/>
+            <a:ext cx="15511196" cy="851057"/>
+            <a:chOff x="0" y="0"/>
+            <a:chExt cx="20681594" cy="1134743"/>
+          </a:xfrm>
+        </p:grpSpPr>
+        <p:sp>
+          <p:nvSpPr>
+            <p:cNvPr id="6" name="Freeform 6"/>
+            <p:cNvSpPr/>
+            <p:nvPr/>
+          </p:nvSpPr>
+          <p:spPr>
+            <a:xfrm>
+              <a:off x="0" y="0"/>
+              <a:ext cx="20681598" cy="1134740"/>
+            </a:xfrm>
+            <a:custGeom>
+              <a:avLst/>
+              <a:gdLst/>
+              <a:ahLst/>
+              <a:cxnLst/>
+              <a:rect l="l" t="t" r="r" b="b"/>
+              <a:pathLst>
+                <a:path w="20681598" h="1134740">
+                  <a:moveTo>
+                    <a:pt x="0" y="0"/>
+                  </a:moveTo>
+                  <a:lnTo>
+                    <a:pt x="20681598" y="0"/>
+                  </a:lnTo>
+                  <a:lnTo>
+                    <a:pt x="20681598" y="1134740"/>
+                  </a:lnTo>
+                  <a:lnTo>
+                    <a:pt x="0" y="1134740"/>
+                  </a:lnTo>
+                  <a:close/>
+                </a:path>
+              </a:pathLst>
+            </a:custGeom>
+            <a:blipFill>
+              <a:blip r:embed="rId3">
+                <a:alphaModFix amt="0"/>
+              </a:blip>
+              <a:stretch>
+                <a:fillRect t="-305131" b="-305131"/>
+              </a:stretch>
+            </a:blipFill>
+          </p:spPr>
+          <p:txBody>
+            <a:bodyPr/>
+            <a:lstStyle/>
+            <a:p>
+              <a:endParaRPr lang="en-US"/>
+            </a:p>
+          </p:txBody>
+        </p:sp>
+        <p:sp>
+          <p:nvSpPr>
+            <p:cNvPr id="7" name="TextBox 7"/>
+            <p:cNvSpPr txBox="1"/>
+            <p:nvPr/>
+          </p:nvSpPr>
+          <p:spPr>
+            <a:xfrm>
+              <a:off x="0" y="0"/>
+              <a:ext cx="20681594" cy="1134743"/>
+            </a:xfrm>
+            <a:prstGeom prst="rect">
+              <a:avLst/>
+            </a:prstGeom>
+          </p:spPr>
+          <p:txBody>
+            <a:bodyPr lIns="0" tIns="0" rIns="0" bIns="0" rtlCol="0" anchor="ctr"/>
+            <a:lstStyle/>
+            <a:p>
+              <a:pPr algn="l">
+                <a:lnSpc>
+                  <a:spcPts val="4683"/>
+                </a:lnSpc>
+              </a:pPr>
+              <a:r>
+                <a:rPr lang="en-US" sz="3903" b="1">
+                  <a:gradFill>
+                    <a:gsLst>
+                      <a:gs pos="0">
+                        <a:srgbClr val="FFFFFF">
+                          <a:alpha val="100000"/>
+                        </a:srgbClr>
+                      </a:gs>
+                      <a:gs pos="100000">
+                        <a:srgbClr val="FFF2C3">
+                          <a:alpha val="100000"/>
+                        </a:srgbClr>
+                      </a:gs>
+                    </a:gsLst>
+                    <a:lin ang="5400000"/>
+                  </a:gradFill>
+                  <a:latin typeface="Inter Bold"/>
+                  <a:ea typeface="Inter Bold"/>
+                  <a:cs typeface="Inter Bold"/>
+                  <a:sym typeface="Inter Bold"/>
+                </a:rPr>
+                <a:t>The Work Before the Work</a:t>
+              </a:r>
+            </a:p>
+          </p:txBody>
+        </p:sp>
+      </p:grpSp>
+      <p:grpSp>
+        <p:nvGrpSpPr>
+          <p:cNvPr id="8" name="Group 8"/>
+          <p:cNvGrpSpPr/>
+          <p:nvPr/>
+        </p:nvGrpSpPr>
+        <p:grpSpPr>
+          <a:xfrm>
+            <a:off x="16217002" y="466706"/>
+            <a:ext cx="1329867" cy="1386402"/>
+            <a:chOff x="0" y="0"/>
+            <a:chExt cx="1053363" cy="1098144"/>
+          </a:xfrm>
+        </p:grpSpPr>
+        <p:sp>
+          <p:nvSpPr>
+            <p:cNvPr id="9" name="Freeform 9" descr="/Users/hstrauss/Documents/GitHub/belvedere-pm/output/deck-rebuild/belv_mark.png"/>
+            <p:cNvSpPr/>
+            <p:nvPr/>
+          </p:nvSpPr>
+          <p:spPr>
+            <a:xfrm>
+              <a:off x="0" y="0"/>
+              <a:ext cx="1053338" cy="1098169"/>
+            </a:xfrm>
+            <a:custGeom>
+              <a:avLst/>
+              <a:gdLst/>
+              <a:ahLst/>
+              <a:cxnLst/>
+              <a:rect l="l" t="t" r="r" b="b"/>
+              <a:pathLst>
+                <a:path w="1053338" h="1098169">
+                  <a:moveTo>
+                    <a:pt x="0" y="0"/>
+                  </a:moveTo>
+                  <a:lnTo>
+                    <a:pt x="1053338" y="0"/>
+                  </a:lnTo>
+                  <a:lnTo>
+                    <a:pt x="1053338" y="1098169"/>
+                  </a:lnTo>
+                  <a:lnTo>
+                    <a:pt x="0" y="1098169"/>
+                  </a:lnTo>
+                  <a:lnTo>
+                    <a:pt x="0" y="0"/>
+                  </a:lnTo>
+                  <a:close/>
+                </a:path>
+              </a:pathLst>
+            </a:custGeom>
+            <a:blipFill>
+              <a:blip r:embed="rId4"/>
+              <a:stretch>
+                <a:fillRect r="-2" b="2"/>
+              </a:stretch>
+            </a:blipFill>
+          </p:spPr>
+          <p:txBody>
+            <a:bodyPr/>
+            <a:lstStyle/>
+            <a:p>
+              <a:endParaRPr lang="en-US"/>
+            </a:p>
+          </p:txBody>
+        </p:sp>
+      </p:grpSp>
+      <p:grpSp>
+        <p:nvGrpSpPr>
+          <p:cNvPr id="10" name="Group 10"/>
+          <p:cNvGrpSpPr/>
+          <p:nvPr/>
+        </p:nvGrpSpPr>
+        <p:grpSpPr>
+          <a:xfrm>
+            <a:off x="727520" y="1619755"/>
+            <a:ext cx="16472068" cy="466706"/>
+            <a:chOff x="0" y="0"/>
+            <a:chExt cx="21962758" cy="622275"/>
+          </a:xfrm>
+        </p:grpSpPr>
+        <p:sp>
+          <p:nvSpPr>
+            <p:cNvPr id="11" name="Freeform 11"/>
+            <p:cNvSpPr/>
+            <p:nvPr/>
+          </p:nvSpPr>
+          <p:spPr>
+            <a:xfrm>
+              <a:off x="0" y="0"/>
+              <a:ext cx="21962759" cy="622278"/>
+            </a:xfrm>
+            <a:custGeom>
+              <a:avLst/>
+              <a:gdLst/>
+              <a:ahLst/>
+              <a:cxnLst/>
+              <a:rect l="l" t="t" r="r" b="b"/>
+              <a:pathLst>
+                <a:path w="21962759" h="622278">
+                  <a:moveTo>
+                    <a:pt x="0" y="0"/>
+                  </a:moveTo>
+                  <a:lnTo>
+                    <a:pt x="21962759" y="0"/>
+                  </a:lnTo>
+                  <a:lnTo>
+                    <a:pt x="21962759" y="622278"/>
+                  </a:lnTo>
+                  <a:lnTo>
+                    <a:pt x="0" y="622278"/>
+                  </a:lnTo>
+                  <a:close/>
+                </a:path>
+              </a:pathLst>
+            </a:custGeom>
+            <a:blipFill>
+              <a:blip r:embed="rId3">
+                <a:alphaModFix amt="0"/>
+              </a:blip>
+              <a:stretch>
+                <a:fillRect t="-637707" b="-637706"/>
+              </a:stretch>
+            </a:blipFill>
+          </p:spPr>
+          <p:txBody>
+            <a:bodyPr/>
+            <a:lstStyle/>
+            <a:p>
+              <a:endParaRPr lang="en-US"/>
+            </a:p>
+          </p:txBody>
+        </p:sp>
+        <p:sp>
+          <p:nvSpPr>
+            <p:cNvPr id="12" name="TextBox 12"/>
+            <p:cNvSpPr txBox="1"/>
+            <p:nvPr/>
+          </p:nvSpPr>
+          <p:spPr>
+            <a:xfrm>
+              <a:off x="0" y="-9525"/>
+              <a:ext cx="21962758" cy="631800"/>
+            </a:xfrm>
+            <a:prstGeom prst="rect">
+              <a:avLst/>
+            </a:prstGeom>
+          </p:spPr>
+          <p:txBody>
+            <a:bodyPr lIns="0" tIns="0" rIns="0" bIns="0" rtlCol="0" anchor="ctr"/>
+            <a:lstStyle/>
+            <a:p>
+              <a:pPr algn="l">
+                <a:lnSpc>
+                  <a:spcPts val="2341"/>
+                </a:lnSpc>
+              </a:pPr>
+              <a:r>
+                <a:rPr lang="en-US" sz="1951" dirty="0">
+                  <a:solidFill>
+                    <a:srgbClr val="9BA4BE"/>
+                  </a:solidFill>
+                  <a:latin typeface="Inter"/>
+                  <a:ea typeface="Inter"/>
+                  <a:cs typeface="Inter"/>
+                  <a:sym typeface="Inter"/>
+                </a:rPr>
+                <a:t>Data is dumb and doesn’t help you use it. A person must investigate by hand, every time.</a:t>
+              </a:r>
+            </a:p>
+          </p:txBody>
+        </p:sp>
+      </p:grpSp>
+      <p:grpSp>
+        <p:nvGrpSpPr>
+          <p:cNvPr id="13" name="Group 13"/>
+          <p:cNvGrpSpPr/>
+          <p:nvPr/>
+        </p:nvGrpSpPr>
+        <p:grpSpPr>
+          <a:xfrm>
+            <a:off x="754971" y="2168823"/>
+            <a:ext cx="16791899" cy="15097"/>
+            <a:chOff x="0" y="0"/>
+            <a:chExt cx="22389198" cy="20130"/>
+          </a:xfrm>
+        </p:grpSpPr>
+        <p:sp>
+          <p:nvSpPr>
+            <p:cNvPr id="14" name="Freeform 14"/>
+            <p:cNvSpPr/>
+            <p:nvPr/>
+          </p:nvSpPr>
+          <p:spPr>
+            <a:xfrm>
+              <a:off x="0" y="0"/>
+              <a:ext cx="22389212" cy="20193"/>
+            </a:xfrm>
+            <a:custGeom>
+              <a:avLst/>
+              <a:gdLst/>
+              <a:ahLst/>
+              <a:cxnLst/>
+              <a:rect l="l" t="t" r="r" b="b"/>
+              <a:pathLst>
+                <a:path w="22389212" h="20193">
+                  <a:moveTo>
+                    <a:pt x="0" y="0"/>
+                  </a:moveTo>
+                  <a:lnTo>
+                    <a:pt x="22389212" y="0"/>
+                  </a:lnTo>
+                  <a:lnTo>
+                    <a:pt x="22389212" y="20193"/>
+                  </a:lnTo>
+                  <a:lnTo>
+                    <a:pt x="0" y="20193"/>
+                  </a:lnTo>
+                  <a:close/>
+                </a:path>
+              </a:pathLst>
+            </a:custGeom>
+            <a:solidFill>
+              <a:srgbClr val="1A2D5A"/>
+            </a:solidFill>
+          </p:spPr>
+          <p:txBody>
+            <a:bodyPr/>
+            <a:lstStyle/>
+            <a:p>
+              <a:endParaRPr lang="en-US"/>
+            </a:p>
+          </p:txBody>
+        </p:sp>
+      </p:grpSp>
+      <p:grpSp>
+        <p:nvGrpSpPr>
+          <p:cNvPr id="15" name="Group 15"/>
+          <p:cNvGrpSpPr/>
+          <p:nvPr/>
+        </p:nvGrpSpPr>
+        <p:grpSpPr>
+          <a:xfrm>
+            <a:off x="0" y="9773431"/>
+            <a:ext cx="18301840" cy="343167"/>
+            <a:chOff x="0" y="0"/>
+            <a:chExt cx="24402453" cy="457556"/>
+          </a:xfrm>
+        </p:grpSpPr>
+        <p:sp>
+          <p:nvSpPr>
+            <p:cNvPr id="16" name="Freeform 16"/>
+            <p:cNvSpPr/>
+            <p:nvPr/>
+          </p:nvSpPr>
+          <p:spPr>
+            <a:xfrm>
+              <a:off x="0" y="0"/>
+              <a:ext cx="24402455" cy="457557"/>
+            </a:xfrm>
+            <a:custGeom>
+              <a:avLst/>
+              <a:gdLst/>
+              <a:ahLst/>
+              <a:cxnLst/>
+              <a:rect l="l" t="t" r="r" b="b"/>
+              <a:pathLst>
+                <a:path w="24402455" h="457557">
+                  <a:moveTo>
+                    <a:pt x="0" y="0"/>
+                  </a:moveTo>
+                  <a:lnTo>
+                    <a:pt x="24402455" y="0"/>
+                  </a:lnTo>
+                  <a:lnTo>
+                    <a:pt x="24402455" y="457557"/>
+                  </a:lnTo>
+                  <a:lnTo>
+                    <a:pt x="0" y="457557"/>
+                  </a:lnTo>
+                  <a:close/>
+                </a:path>
+              </a:pathLst>
+            </a:custGeom>
+            <a:blipFill>
+              <a:blip r:embed="rId3">
+                <a:alphaModFix amt="0"/>
+              </a:blip>
+              <a:stretch>
+                <a:fillRect t="-989176" b="-989175"/>
+              </a:stretch>
+            </a:blipFill>
+          </p:spPr>
+          <p:txBody>
+            <a:bodyPr/>
+            <a:lstStyle/>
+            <a:p>
+              <a:endParaRPr lang="en-US"/>
+            </a:p>
+          </p:txBody>
+        </p:sp>
+        <p:sp>
+          <p:nvSpPr>
+            <p:cNvPr id="17" name="TextBox 17"/>
+            <p:cNvSpPr txBox="1"/>
+            <p:nvPr/>
+          </p:nvSpPr>
+          <p:spPr>
+            <a:xfrm>
+              <a:off x="0" y="0"/>
+              <a:ext cx="24402453" cy="457556"/>
+            </a:xfrm>
+            <a:prstGeom prst="rect">
+              <a:avLst/>
+            </a:prstGeom>
+          </p:spPr>
+          <p:txBody>
+            <a:bodyPr lIns="0" tIns="0" rIns="0" bIns="0" rtlCol="0" anchor="ctr"/>
+            <a:lstStyle/>
+            <a:p>
+              <a:pPr algn="ctr">
+                <a:lnSpc>
+                  <a:spcPts val="1351"/>
+                </a:lnSpc>
+              </a:pPr>
+              <a:r>
+                <a:rPr lang="en-US" sz="1125" spc="450">
+                  <a:solidFill>
+                    <a:srgbClr val="8590B3"/>
+                  </a:solidFill>
+                  <a:latin typeface="JetBrains Mono"/>
+                  <a:ea typeface="JetBrains Mono"/>
+                  <a:cs typeface="JetBrains Mono"/>
+                  <a:sym typeface="JetBrains Mono"/>
+                </a:rPr>
+                <a:t>CLEARFRACTURE.AI</a:t>
+              </a:r>
+            </a:p>
+          </p:txBody>
+        </p:sp>
+      </p:grpSp>
+      <p:grpSp>
+        <p:nvGrpSpPr>
+          <p:cNvPr id="18" name="Group 18"/>
+          <p:cNvGrpSpPr/>
+          <p:nvPr/>
+        </p:nvGrpSpPr>
+        <p:grpSpPr>
+          <a:xfrm>
+            <a:off x="17135065" y="9773431"/>
+            <a:ext cx="823608" cy="343168"/>
+            <a:chOff x="0" y="0"/>
+            <a:chExt cx="1098144" cy="457557"/>
+          </a:xfrm>
+        </p:grpSpPr>
+        <p:sp>
+          <p:nvSpPr>
+            <p:cNvPr id="19" name="Freeform 19"/>
+            <p:cNvSpPr/>
+            <p:nvPr/>
+          </p:nvSpPr>
+          <p:spPr>
+            <a:xfrm>
+              <a:off x="0" y="0"/>
+              <a:ext cx="1098138" cy="457559"/>
+            </a:xfrm>
+            <a:custGeom>
+              <a:avLst/>
+              <a:gdLst/>
+              <a:ahLst/>
+              <a:cxnLst/>
+              <a:rect l="l" t="t" r="r" b="b"/>
+              <a:pathLst>
+                <a:path w="1098138" h="457559">
+                  <a:moveTo>
+                    <a:pt x="0" y="0"/>
+                  </a:moveTo>
+                  <a:lnTo>
+                    <a:pt x="1098138" y="0"/>
+                  </a:lnTo>
+                  <a:lnTo>
+                    <a:pt x="1098138" y="457559"/>
+                  </a:lnTo>
+                  <a:lnTo>
+                    <a:pt x="0" y="457559"/>
+                  </a:lnTo>
+                  <a:close/>
+                </a:path>
+              </a:pathLst>
+            </a:custGeom>
+            <a:blipFill>
+              <a:blip r:embed="rId3">
+                <a:alphaModFix amt="0"/>
+              </a:blip>
+              <a:stretch>
+                <a:fillRect l="-3459" r="-3459"/>
+              </a:stretch>
+            </a:blipFill>
+          </p:spPr>
+          <p:txBody>
+            <a:bodyPr/>
+            <a:lstStyle/>
+            <a:p>
+              <a:endParaRPr lang="en-US"/>
+            </a:p>
+          </p:txBody>
+        </p:sp>
+        <p:sp>
+          <p:nvSpPr>
+            <p:cNvPr id="20" name="TextBox 20"/>
+            <p:cNvSpPr txBox="1"/>
+            <p:nvPr/>
+          </p:nvSpPr>
+          <p:spPr>
+            <a:xfrm>
+              <a:off x="0" y="0"/>
+              <a:ext cx="1098144" cy="457557"/>
+            </a:xfrm>
+            <a:prstGeom prst="rect">
+              <a:avLst/>
+            </a:prstGeom>
+          </p:spPr>
+          <p:txBody>
+            <a:bodyPr lIns="0" tIns="0" rIns="0" bIns="0" rtlCol="0" anchor="ctr"/>
+            <a:lstStyle/>
+            <a:p>
+              <a:pPr algn="r">
+                <a:lnSpc>
+                  <a:spcPts val="1351"/>
+                </a:lnSpc>
+              </a:pPr>
+              <a:r>
+                <a:rPr lang="en-US" sz="1125">
+                  <a:solidFill>
+                    <a:srgbClr val="8590B3"/>
+                  </a:solidFill>
+                  <a:latin typeface="JetBrains Mono"/>
+                  <a:ea typeface="JetBrains Mono"/>
+                  <a:cs typeface="JetBrains Mono"/>
+                  <a:sym typeface="JetBrains Mono"/>
+                </a:rPr>
+                <a:t>03/13</a:t>
+              </a:r>
+            </a:p>
+          </p:txBody>
+        </p:sp>
+      </p:grpSp>
+      <p:grpSp>
+        <p:nvGrpSpPr>
+          <p:cNvPr id="23" name="Group 23"/>
+          <p:cNvGrpSpPr/>
+          <p:nvPr/>
+        </p:nvGrpSpPr>
+        <p:grpSpPr>
+          <a:xfrm>
+            <a:off x="754971" y="7539023"/>
+            <a:ext cx="3947241" cy="768847"/>
+            <a:chOff x="0" y="0"/>
+            <a:chExt cx="1039603" cy="202495"/>
+          </a:xfrm>
+        </p:grpSpPr>
+        <p:sp>
+          <p:nvSpPr>
+            <p:cNvPr id="24" name="Freeform 24"/>
+            <p:cNvSpPr/>
+            <p:nvPr/>
+          </p:nvSpPr>
+          <p:spPr>
+            <a:xfrm>
+              <a:off x="0" y="0"/>
+              <a:ext cx="1039603" cy="202495"/>
+            </a:xfrm>
+            <a:custGeom>
+              <a:avLst/>
+              <a:gdLst/>
+              <a:ahLst/>
+              <a:cxnLst/>
+              <a:rect l="l" t="t" r="r" b="b"/>
+              <a:pathLst>
+                <a:path w="1039603" h="202495">
+                  <a:moveTo>
+                    <a:pt x="0" y="0"/>
+                  </a:moveTo>
+                  <a:lnTo>
+                    <a:pt x="1039603" y="0"/>
+                  </a:lnTo>
+                  <a:lnTo>
+                    <a:pt x="1039603" y="202495"/>
+                  </a:lnTo>
+                  <a:lnTo>
+                    <a:pt x="0" y="202495"/>
+                  </a:lnTo>
+                  <a:close/>
+                </a:path>
+              </a:pathLst>
+            </a:custGeom>
+            <a:solidFill>
+              <a:srgbClr val="081434"/>
+            </a:solidFill>
+          </p:spPr>
+          <p:txBody>
+            <a:bodyPr/>
+            <a:lstStyle/>
+            <a:p>
+              <a:endParaRPr lang="en-US"/>
+            </a:p>
+          </p:txBody>
+        </p:sp>
+        <p:sp>
+          <p:nvSpPr>
+            <p:cNvPr id="25" name="TextBox 25"/>
+            <p:cNvSpPr txBox="1"/>
+            <p:nvPr/>
+          </p:nvSpPr>
+          <p:spPr>
+            <a:xfrm>
+              <a:off x="0" y="-9525"/>
+              <a:ext cx="1039603" cy="212020"/>
+            </a:xfrm>
+            <a:prstGeom prst="rect">
+              <a:avLst/>
+            </a:prstGeom>
+          </p:spPr>
+          <p:txBody>
+            <a:bodyPr lIns="50800" tIns="50800" rIns="50800" bIns="50800" rtlCol="0" anchor="ctr"/>
+            <a:lstStyle/>
+            <a:p>
+              <a:pPr algn="ctr">
+                <a:lnSpc>
+                  <a:spcPts val="1801"/>
+                </a:lnSpc>
+              </a:pPr>
+              <a:endParaRPr/>
+            </a:p>
+          </p:txBody>
+        </p:sp>
+      </p:grpSp>
+      <p:pic>
+        <p:nvPicPr>
+          <p:cNvPr id="27" name="Picture 26">
+            <a:extLst>
+              <a:ext uri="{FF2B5EF4-FFF2-40B4-BE49-F238E27FC236}">
+                <a16:creationId xmlns:a16="http://schemas.microsoft.com/office/drawing/2014/main" id="{17AC541E-F3C7-D446-F0E5-C4133FFA7F77}"/>
+              </a:ext>
+            </a:extLst>
+          </p:cNvPr>
+          <p:cNvPicPr>
+            <a:picLocks noChangeAspect="1"/>
+          </p:cNvPicPr>
+          <p:nvPr/>
+        </p:nvPicPr>
+        <p:blipFill>
+          <a:blip r:embed="rId5"/>
+          <a:stretch>
+            <a:fillRect/>
+          </a:stretch>
+        </p:blipFill>
+        <p:spPr>
+          <a:xfrm>
+            <a:off x="304800" y="2499650"/>
+            <a:ext cx="17882489" cy="6775787"/>
+          </a:xfrm>
+          <a:prstGeom prst="rect">
+            <a:avLst/>
+          </a:prstGeom>
+        </p:spPr>
+      </p:pic>
+    </p:spTree>
+  </p:cSld>
+  <p:clrMapOvr>
+    <a:masterClrMapping/>
+  </p:clrMapOvr>
+</p:sld>
+</file>
+
+<file path=ppt/slides/slide4.xml><?xml version="1.0" encoding="utf-8"?>
 <p:sld xmlns:a="http://schemas.openxmlformats.org/drawingml/2006/main" xmlns:r="http://schemas.openxmlformats.org/officeDocument/2006/relationships" xmlns:p="http://schemas.openxmlformats.org/presentationml/2006/main">
   <p:cSld>
     <p:bg>
@@ -8614,7 +7776,7 @@
                 </a:lnSpc>
               </a:pPr>
               <a:r>
-                <a:rPr lang="en-US" sz="1501" spc="375">
+                <a:rPr lang="en-US" sz="1501" spc="375" dirty="0">
                   <a:solidFill>
                     <a:srgbClr val="FFF2C2"/>
                   </a:solidFill>
@@ -8623,7 +7785,7 @@
                   <a:cs typeface="JetBrains Mono"/>
                   <a:sym typeface="JetBrains Mono"/>
                 </a:rPr>
-                <a:t>AI CAN FIX THAT, RIGHT?</a:t>
+                <a:t>THE AGE-OLD PROBLEM</a:t>
               </a:r>
             </a:p>
           </p:txBody>
@@ -8638,9 +7800,9 @@
         <p:grpSpPr>
           <a:xfrm>
             <a:off x="713794" y="796147"/>
-            <a:ext cx="15511196" cy="851059"/>
+            <a:ext cx="15511196" cy="851057"/>
             <a:chOff x="0" y="0"/>
-            <a:chExt cx="20681594" cy="1134745"/>
+            <a:chExt cx="20681594" cy="1134743"/>
           </a:xfrm>
         </p:grpSpPr>
         <p:sp>
@@ -8652,7 +7814,7 @@
           <p:spPr>
             <a:xfrm>
               <a:off x="0" y="0"/>
-              <a:ext cx="20681598" cy="1134743"/>
+              <a:ext cx="20681598" cy="1134740"/>
             </a:xfrm>
             <a:custGeom>
               <a:avLst/>
@@ -8661,7 +7823,7 @@
               <a:cxnLst/>
               <a:rect l="l" t="t" r="r" b="b"/>
               <a:pathLst>
-                <a:path w="20681598" h="1134743">
+                <a:path w="20681598" h="1134740">
                   <a:moveTo>
                     <a:pt x="0" y="0"/>
                   </a:moveTo>
@@ -8669,10 +7831,10 @@
                     <a:pt x="20681598" y="0"/>
                   </a:lnTo>
                   <a:lnTo>
-                    <a:pt x="20681598" y="1134743"/>
-                  </a:lnTo>
-                  <a:lnTo>
-                    <a:pt x="0" y="1134743"/>
+                    <a:pt x="20681598" y="1134740"/>
+                  </a:lnTo>
+                  <a:lnTo>
+                    <a:pt x="0" y="1134740"/>
                   </a:lnTo>
                   <a:close/>
                 </a:path>
@@ -8683,7 +7845,7 @@
                 <a:alphaModFix amt="0"/>
               </a:blip>
               <a:stretch>
-                <a:fillRect t="-305130" b="-305130"/>
+                <a:fillRect t="-305131" b="-305131"/>
               </a:stretch>
             </a:blipFill>
           </p:spPr>
@@ -8704,7 +7866,7 @@
           <p:spPr>
             <a:xfrm>
               <a:off x="0" y="0"/>
-              <a:ext cx="20681594" cy="1134745"/>
+              <a:ext cx="20681594" cy="1134743"/>
             </a:xfrm>
             <a:prstGeom prst="rect">
               <a:avLst/>
@@ -8729,7 +7891,7 @@
                   <a:cs typeface="Inter Bold"/>
                   <a:sym typeface="Inter Bold"/>
                 </a:rPr>
-                <a:t>Should You </a:t>
+                <a:t>Every Feed Ends in </a:t>
               </a:r>
               <a:r>
                 <a:rPr lang="en-US" sz="3903" b="1" dirty="0">
@@ -8741,7 +7903,7 @@
                   <a:cs typeface="Inter Bold"/>
                   <a:sym typeface="Inter Bold"/>
                 </a:rPr>
-                <a:t>Throw AI at It?</a:t>
+                <a:t>a Person's Queue</a:t>
               </a:r>
             </a:p>
           </p:txBody>
@@ -8915,7 +8077,7 @@
                   <a:cs typeface="Inter"/>
                   <a:sym typeface="Inter"/>
                 </a:rPr>
-                <a:t>You get answers, but can you trust and afford them?</a:t>
+                <a:t>Databases, APIs, files, streams, buckets, models, pipelines. Each one waits on a data engineering specialist.</a:t>
               </a:r>
             </a:p>
           </p:txBody>
@@ -8991,6 +8153,112 @@
         </p:nvGrpSpPr>
         <p:grpSpPr>
           <a:xfrm>
+            <a:off x="0" y="9773431"/>
+            <a:ext cx="18301840" cy="343167"/>
+            <a:chOff x="0" y="0"/>
+            <a:chExt cx="24402453" cy="457556"/>
+          </a:xfrm>
+        </p:grpSpPr>
+        <p:sp>
+          <p:nvSpPr>
+            <p:cNvPr id="16" name="Freeform 16"/>
+            <p:cNvSpPr/>
+            <p:nvPr/>
+          </p:nvSpPr>
+          <p:spPr>
+            <a:xfrm>
+              <a:off x="0" y="0"/>
+              <a:ext cx="24402455" cy="457557"/>
+            </a:xfrm>
+            <a:custGeom>
+              <a:avLst/>
+              <a:gdLst/>
+              <a:ahLst/>
+              <a:cxnLst/>
+              <a:rect l="l" t="t" r="r" b="b"/>
+              <a:pathLst>
+                <a:path w="24402455" h="457557">
+                  <a:moveTo>
+                    <a:pt x="0" y="0"/>
+                  </a:moveTo>
+                  <a:lnTo>
+                    <a:pt x="24402455" y="0"/>
+                  </a:lnTo>
+                  <a:lnTo>
+                    <a:pt x="24402455" y="457557"/>
+                  </a:lnTo>
+                  <a:lnTo>
+                    <a:pt x="0" y="457557"/>
+                  </a:lnTo>
+                  <a:close/>
+                </a:path>
+              </a:pathLst>
+            </a:custGeom>
+            <a:blipFill>
+              <a:blip r:embed="rId3">
+                <a:alphaModFix amt="0"/>
+              </a:blip>
+              <a:stretch>
+                <a:fillRect t="-989176" b="-989175"/>
+              </a:stretch>
+            </a:blipFill>
+          </p:spPr>
+          <p:txBody>
+            <a:bodyPr/>
+            <a:lstStyle/>
+            <a:p>
+              <a:endParaRPr lang="en-US"/>
+            </a:p>
+          </p:txBody>
+        </p:sp>
+        <p:sp>
+          <p:nvSpPr>
+            <p:cNvPr id="17" name="TextBox 17"/>
+            <p:cNvSpPr txBox="1"/>
+            <p:nvPr/>
+          </p:nvSpPr>
+          <p:spPr>
+            <a:xfrm>
+              <a:off x="0" y="0"/>
+              <a:ext cx="24402453" cy="457556"/>
+            </a:xfrm>
+            <a:prstGeom prst="rect">
+              <a:avLst/>
+            </a:prstGeom>
+          </p:spPr>
+          <p:txBody>
+            <a:bodyPr lIns="0" tIns="0" rIns="0" bIns="0" rtlCol="0" anchor="ctr"/>
+            <a:lstStyle/>
+            <a:p>
+              <a:pPr algn="ctr">
+                <a:lnSpc>
+                  <a:spcPts val="1351"/>
+                </a:lnSpc>
+              </a:pPr>
+              <a:r>
+                <a:rPr lang="en-US" sz="1125" spc="450">
+                  <a:solidFill>
+                    <a:srgbClr val="8590B3"/>
+                  </a:solidFill>
+                  <a:latin typeface="JetBrains Mono"/>
+                  <a:ea typeface="JetBrains Mono"/>
+                  <a:cs typeface="JetBrains Mono"/>
+                  <a:sym typeface="JetBrains Mono"/>
+                </a:rPr>
+                <a:t>CLEARFRACTURE.AI</a:t>
+              </a:r>
+            </a:p>
+          </p:txBody>
+        </p:sp>
+      </p:grpSp>
+      <p:grpSp>
+        <p:nvGrpSpPr>
+          <p:cNvPr id="18" name="Group 18"/>
+          <p:cNvGrpSpPr/>
+          <p:nvPr/>
+        </p:nvGrpSpPr>
+        <p:grpSpPr>
+          <a:xfrm>
             <a:off x="17135065" y="9773431"/>
             <a:ext cx="823608" cy="343168"/>
             <a:chOff x="0" y="0"/>
@@ -8999,7 +8267,7 @@
         </p:grpSpPr>
         <p:sp>
           <p:nvSpPr>
-            <p:cNvPr id="16" name="Freeform 16"/>
+            <p:cNvPr id="19" name="Freeform 19"/>
             <p:cNvSpPr/>
             <p:nvPr/>
           </p:nvSpPr>
@@ -9051,7 +8319,7 @@
         </p:sp>
         <p:sp>
           <p:nvSpPr>
-            <p:cNvPr id="17" name="TextBox 17"/>
+            <p:cNvPr id="20" name="TextBox 20"/>
             <p:cNvSpPr txBox="1"/>
             <p:nvPr/>
           </p:nvSpPr>
@@ -9083,7 +8351,7 @@
                   <a:cs typeface="JetBrains Mono"/>
                   <a:sym typeface="JetBrains Mono"/>
                 </a:rPr>
-                <a:t>04/13</a:t>
+                <a:t>02/13</a:t>
               </a:r>
             </a:p>
           </p:txBody>
@@ -9091,28 +8359,28 @@
       </p:grpSp>
       <p:grpSp>
         <p:nvGrpSpPr>
-          <p:cNvPr id="18" name="Group 18"/>
+          <p:cNvPr id="21" name="Group 21"/>
           <p:cNvGrpSpPr/>
           <p:nvPr/>
         </p:nvGrpSpPr>
         <p:grpSpPr>
           <a:xfrm>
-            <a:off x="387014" y="2319247"/>
-            <a:ext cx="17513973" cy="4660971"/>
+            <a:off x="754971" y="2580675"/>
+            <a:ext cx="16791899" cy="6364666"/>
             <a:chOff x="0" y="0"/>
-            <a:chExt cx="21230666" cy="5650090"/>
+            <a:chExt cx="21230666" cy="8047101"/>
           </a:xfrm>
         </p:grpSpPr>
         <p:sp>
           <p:nvSpPr>
-            <p:cNvPr id="19" name="Freeform 19" descr="/Users/hstrauss/Documents/GitHub/belvedere-pm/output/deck-rebuild/illus/aibox.png"/>
+            <p:cNvPr id="22" name="Freeform 22" descr="/Users/hstrauss/Documents/GitHub/belvedere-pm/output/deck-rebuild/illus/bottleneck.png"/>
             <p:cNvSpPr/>
             <p:nvPr/>
           </p:nvSpPr>
           <p:spPr>
             <a:xfrm>
               <a:off x="0" y="0"/>
-              <a:ext cx="21230717" cy="5650103"/>
+              <a:ext cx="21230717" cy="8047101"/>
             </a:xfrm>
             <a:custGeom>
               <a:avLst/>
@@ -9121,7 +8389,7 @@
               <a:cxnLst/>
               <a:rect l="l" t="t" r="r" b="b"/>
               <a:pathLst>
-                <a:path w="21230717" h="5650103">
+                <a:path w="21230717" h="8047101">
                   <a:moveTo>
                     <a:pt x="0" y="0"/>
                   </a:moveTo>
@@ -9129,10 +8397,10 @@
                     <a:pt x="21230717" y="0"/>
                   </a:lnTo>
                   <a:lnTo>
-                    <a:pt x="21230717" y="5650103"/>
-                  </a:lnTo>
-                  <a:lnTo>
-                    <a:pt x="0" y="5650103"/>
+                    <a:pt x="21230717" y="8047101"/>
+                  </a:lnTo>
+                  <a:lnTo>
+                    <a:pt x="0" y="8047101"/>
                   </a:lnTo>
                   <a:lnTo>
                     <a:pt x="0" y="0"/>
@@ -9159,28 +8427,28 @@
       </p:grpSp>
       <p:grpSp>
         <p:nvGrpSpPr>
-          <p:cNvPr id="20" name="Group 20"/>
+          <p:cNvPr id="23" name="Group 23"/>
           <p:cNvGrpSpPr/>
           <p:nvPr/>
         </p:nvGrpSpPr>
         <p:grpSpPr>
           <a:xfrm>
-            <a:off x="754971" y="7487182"/>
-            <a:ext cx="8071314" cy="13726"/>
+            <a:off x="459946" y="2450237"/>
+            <a:ext cx="17381948" cy="7114027"/>
             <a:chOff x="0" y="0"/>
-            <a:chExt cx="10761751" cy="18301"/>
+            <a:chExt cx="21230666" cy="8689219"/>
           </a:xfrm>
         </p:grpSpPr>
         <p:sp>
           <p:nvSpPr>
-            <p:cNvPr id="21" name="Freeform 21"/>
+            <p:cNvPr id="24" name="Freeform 24" descr="/Users/hstrauss/Documents/GitHub/belvedere-pm/output/deck-rebuild/illus/bottleneck.png"/>
             <p:cNvSpPr/>
             <p:nvPr/>
           </p:nvSpPr>
           <p:spPr>
             <a:xfrm>
               <a:off x="0" y="0"/>
-              <a:ext cx="10761726" cy="18288"/>
+              <a:ext cx="21230717" cy="8689173"/>
             </a:xfrm>
             <a:custGeom>
               <a:avLst/>
@@ -9189,153 +8457,30 @@
               <a:cxnLst/>
               <a:rect l="l" t="t" r="r" b="b"/>
               <a:pathLst>
-                <a:path w="10761726" h="18288">
+                <a:path w="21230717" h="8689173">
                   <a:moveTo>
                     <a:pt x="0" y="0"/>
                   </a:moveTo>
                   <a:lnTo>
-                    <a:pt x="10761726" y="0"/>
-                  </a:lnTo>
-                  <a:lnTo>
-                    <a:pt x="10761726" y="18288"/>
-                  </a:lnTo>
-                  <a:lnTo>
-                    <a:pt x="0" y="18288"/>
-                  </a:lnTo>
-                  <a:close/>
-                </a:path>
-              </a:pathLst>
-            </a:custGeom>
-            <a:solidFill>
-              <a:srgbClr val="1A2D5A"/>
-            </a:solidFill>
-          </p:spPr>
-          <p:txBody>
-            <a:bodyPr/>
-            <a:lstStyle/>
-            <a:p>
-              <a:endParaRPr lang="en-US"/>
-            </a:p>
-          </p:txBody>
-        </p:sp>
-      </p:grpSp>
-      <p:grpSp>
-        <p:nvGrpSpPr>
-          <p:cNvPr id="22" name="Group 22"/>
-          <p:cNvGrpSpPr/>
-          <p:nvPr/>
-        </p:nvGrpSpPr>
-        <p:grpSpPr>
-          <a:xfrm>
-            <a:off x="754971" y="7483067"/>
-            <a:ext cx="617706" cy="21965"/>
-            <a:chOff x="0" y="0"/>
-            <a:chExt cx="823608" cy="29286"/>
-          </a:xfrm>
-        </p:grpSpPr>
-        <p:sp>
-          <p:nvSpPr>
-            <p:cNvPr id="23" name="Freeform 23"/>
-            <p:cNvSpPr/>
-            <p:nvPr/>
-          </p:nvSpPr>
-          <p:spPr>
-            <a:xfrm>
-              <a:off x="0" y="0"/>
-              <a:ext cx="823595" cy="29337"/>
-            </a:xfrm>
-            <a:custGeom>
-              <a:avLst/>
-              <a:gdLst/>
-              <a:ahLst/>
-              <a:cxnLst/>
-              <a:rect l="l" t="t" r="r" b="b"/>
-              <a:pathLst>
-                <a:path w="823595" h="29337">
-                  <a:moveTo>
+                    <a:pt x="21230717" y="0"/>
+                  </a:lnTo>
+                  <a:lnTo>
+                    <a:pt x="21230717" y="8689173"/>
+                  </a:lnTo>
+                  <a:lnTo>
+                    <a:pt x="0" y="8689173"/>
+                  </a:lnTo>
+                  <a:lnTo>
                     <a:pt x="0" y="0"/>
-                  </a:moveTo>
-                  <a:lnTo>
-                    <a:pt x="823595" y="0"/>
-                  </a:lnTo>
-                  <a:lnTo>
-                    <a:pt x="823595" y="29337"/>
-                  </a:lnTo>
-                  <a:lnTo>
-                    <a:pt x="0" y="29337"/>
-                  </a:lnTo>
-                  <a:close/>
-                </a:path>
-              </a:pathLst>
-            </a:custGeom>
-            <a:solidFill>
-              <a:srgbClr val="FFF2C2"/>
-            </a:solidFill>
-          </p:spPr>
-          <p:txBody>
-            <a:bodyPr/>
-            <a:lstStyle/>
-            <a:p>
-              <a:endParaRPr lang="en-US"/>
-            </a:p>
-          </p:txBody>
-        </p:sp>
-      </p:grpSp>
-      <p:grpSp>
-        <p:nvGrpSpPr>
-          <p:cNvPr id="24" name="Group 24"/>
-          <p:cNvGrpSpPr/>
-          <p:nvPr/>
-        </p:nvGrpSpPr>
-        <p:grpSpPr>
-          <a:xfrm>
-            <a:off x="754971" y="7606606"/>
-            <a:ext cx="617706" cy="411804"/>
-            <a:chOff x="0" y="0"/>
-            <a:chExt cx="823608" cy="549072"/>
-          </a:xfrm>
-        </p:grpSpPr>
-        <p:sp>
-          <p:nvSpPr>
-            <p:cNvPr id="25" name="Freeform 25"/>
-            <p:cNvSpPr/>
-            <p:nvPr/>
-          </p:nvSpPr>
-          <p:spPr>
-            <a:xfrm>
-              <a:off x="0" y="0"/>
-              <a:ext cx="823603" cy="549069"/>
-            </a:xfrm>
-            <a:custGeom>
-              <a:avLst/>
-              <a:gdLst/>
-              <a:ahLst/>
-              <a:cxnLst/>
-              <a:rect l="l" t="t" r="r" b="b"/>
-              <a:pathLst>
-                <a:path w="823603" h="549069">
-                  <a:moveTo>
-                    <a:pt x="0" y="0"/>
-                  </a:moveTo>
-                  <a:lnTo>
-                    <a:pt x="823603" y="0"/>
-                  </a:lnTo>
-                  <a:lnTo>
-                    <a:pt x="823603" y="549069"/>
-                  </a:lnTo>
-                  <a:lnTo>
-                    <a:pt x="0" y="549069"/>
                   </a:lnTo>
                   <a:close/>
                 </a:path>
               </a:pathLst>
             </a:custGeom>
             <a:blipFill>
-              <a:blip r:embed="rId3">
-                <a:alphaModFix amt="0"/>
-              </a:blip>
+              <a:blip r:embed="rId6"/>
               <a:stretch>
-                <a:fillRect l="-35535" r="-35536"/>
+                <a:fillRect t="-5172" b="-5172"/>
               </a:stretch>
             </a:blipFill>
           </p:spPr>
@@ -9347,1324 +8492,7 @@
             </a:p>
           </p:txBody>
         </p:sp>
-        <p:sp>
-          <p:nvSpPr>
-            <p:cNvPr id="26" name="TextBox 26"/>
-            <p:cNvSpPr txBox="1"/>
-            <p:nvPr/>
-          </p:nvSpPr>
-          <p:spPr>
-            <a:xfrm>
-              <a:off x="0" y="-9525"/>
-              <a:ext cx="823608" cy="558597"/>
-            </a:xfrm>
-            <a:prstGeom prst="rect">
-              <a:avLst/>
-            </a:prstGeom>
-          </p:spPr>
-          <p:txBody>
-            <a:bodyPr lIns="0" tIns="0" rIns="0" bIns="0" rtlCol="0" anchor="ctr"/>
-            <a:lstStyle/>
-            <a:p>
-              <a:pPr algn="l">
-                <a:lnSpc>
-                  <a:spcPts val="1801"/>
-                </a:lnSpc>
-              </a:pPr>
-              <a:r>
-                <a:rPr lang="en-US" sz="1501">
-                  <a:solidFill>
-                    <a:srgbClr val="FFF2C2"/>
-                  </a:solidFill>
-                  <a:latin typeface="JetBrains Mono"/>
-                  <a:ea typeface="JetBrains Mono"/>
-                  <a:cs typeface="JetBrains Mono"/>
-                  <a:sym typeface="JetBrains Mono"/>
-                </a:rPr>
-                <a:t>01</a:t>
-              </a:r>
-            </a:p>
-          </p:txBody>
-        </p:sp>
       </p:grpSp>
-      <p:grpSp>
-        <p:nvGrpSpPr>
-          <p:cNvPr id="27" name="Group 27"/>
-          <p:cNvGrpSpPr/>
-          <p:nvPr/>
-        </p:nvGrpSpPr>
-        <p:grpSpPr>
-          <a:xfrm>
-            <a:off x="1413853" y="7579155"/>
-            <a:ext cx="7412431" cy="411804"/>
-            <a:chOff x="0" y="0"/>
-            <a:chExt cx="9883242" cy="549072"/>
-          </a:xfrm>
-        </p:grpSpPr>
-        <p:sp>
-          <p:nvSpPr>
-            <p:cNvPr id="28" name="Freeform 28"/>
-            <p:cNvSpPr/>
-            <p:nvPr/>
-          </p:nvSpPr>
-          <p:spPr>
-            <a:xfrm>
-              <a:off x="0" y="0"/>
-              <a:ext cx="9883241" cy="549069"/>
-            </a:xfrm>
-            <a:custGeom>
-              <a:avLst/>
-              <a:gdLst/>
-              <a:ahLst/>
-              <a:cxnLst/>
-              <a:rect l="l" t="t" r="r" b="b"/>
-              <a:pathLst>
-                <a:path w="9883241" h="549069">
-                  <a:moveTo>
-                    <a:pt x="0" y="0"/>
-                  </a:moveTo>
-                  <a:lnTo>
-                    <a:pt x="9883241" y="0"/>
-                  </a:lnTo>
-                  <a:lnTo>
-                    <a:pt x="9883241" y="549069"/>
-                  </a:lnTo>
-                  <a:lnTo>
-                    <a:pt x="0" y="549069"/>
-                  </a:lnTo>
-                  <a:close/>
-                </a:path>
-              </a:pathLst>
-            </a:custGeom>
-            <a:blipFill>
-              <a:blip r:embed="rId3">
-                <a:alphaModFix amt="0"/>
-              </a:blip>
-              <a:stretch>
-                <a:fillRect t="-300730" b="-300730"/>
-              </a:stretch>
-            </a:blipFill>
-          </p:spPr>
-          <p:txBody>
-            <a:bodyPr/>
-            <a:lstStyle/>
-            <a:p>
-              <a:endParaRPr lang="en-US"/>
-            </a:p>
-          </p:txBody>
-        </p:sp>
-        <p:sp>
-          <p:nvSpPr>
-            <p:cNvPr id="29" name="TextBox 29"/>
-            <p:cNvSpPr txBox="1"/>
-            <p:nvPr/>
-          </p:nvSpPr>
-          <p:spPr>
-            <a:xfrm>
-              <a:off x="0" y="-9525"/>
-              <a:ext cx="9883242" cy="558597"/>
-            </a:xfrm>
-            <a:prstGeom prst="rect">
-              <a:avLst/>
-            </a:prstGeom>
-          </p:spPr>
-          <p:txBody>
-            <a:bodyPr lIns="0" tIns="0" rIns="0" bIns="0" rtlCol="0" anchor="ctr"/>
-            <a:lstStyle/>
-            <a:p>
-              <a:pPr algn="l">
-                <a:lnSpc>
-                  <a:spcPts val="2341"/>
-                </a:lnSpc>
-              </a:pPr>
-              <a:r>
-                <a:rPr lang="en-US" sz="1951" b="1">
-                  <a:solidFill>
-                    <a:srgbClr val="F0F1F4"/>
-                  </a:solidFill>
-                  <a:latin typeface="Inter Bold"/>
-                  <a:ea typeface="Inter Bold"/>
-                  <a:cs typeface="Inter Bold"/>
-                  <a:sym typeface="Inter Bold"/>
-                </a:rPr>
-                <a:t>Not transparent</a:t>
-              </a:r>
-            </a:p>
-          </p:txBody>
-        </p:sp>
-      </p:grpSp>
-      <p:sp>
-        <p:nvSpPr>
-          <p:cNvPr id="30" name="TextBox 30"/>
-          <p:cNvSpPr txBox="1"/>
-          <p:nvPr/>
-        </p:nvSpPr>
-        <p:spPr>
-          <a:xfrm>
-            <a:off x="1505293" y="8058806"/>
-            <a:ext cx="7133463" cy="259067"/>
-          </a:xfrm>
-          <a:prstGeom prst="rect">
-            <a:avLst/>
-          </a:prstGeom>
-        </p:spPr>
-        <p:txBody>
-          <a:bodyPr lIns="0" tIns="0" rIns="0" bIns="0" rtlCol="0" anchor="t">
-            <a:spAutoFit/>
-          </a:bodyPr>
-          <a:lstStyle/>
-          <a:p>
-            <a:pPr algn="l">
-              <a:lnSpc>
-                <a:spcPts val="2026"/>
-              </a:lnSpc>
-            </a:pPr>
-            <a:r>
-              <a:rPr lang="en-US" sz="1576">
-                <a:solidFill>
-                  <a:srgbClr val="9BA4BE"/>
-                </a:solidFill>
-                <a:latin typeface="Inter"/>
-                <a:ea typeface="Inter"/>
-                <a:cs typeface="Inter"/>
-                <a:sym typeface="Inter"/>
-              </a:rPr>
-              <a:t>Models can't explain their actual reasoning.</a:t>
-            </a:r>
-          </a:p>
-        </p:txBody>
-      </p:sp>
-      <p:grpSp>
-        <p:nvGrpSpPr>
-          <p:cNvPr id="31" name="Group 31"/>
-          <p:cNvGrpSpPr/>
-          <p:nvPr/>
-        </p:nvGrpSpPr>
-        <p:grpSpPr>
-          <a:xfrm>
-            <a:off x="9471441" y="7487182"/>
-            <a:ext cx="8071314" cy="13726"/>
-            <a:chOff x="0" y="0"/>
-            <a:chExt cx="10761751" cy="18301"/>
-          </a:xfrm>
-        </p:grpSpPr>
-        <p:sp>
-          <p:nvSpPr>
-            <p:cNvPr id="32" name="Freeform 32"/>
-            <p:cNvSpPr/>
-            <p:nvPr/>
-          </p:nvSpPr>
-          <p:spPr>
-            <a:xfrm>
-              <a:off x="0" y="0"/>
-              <a:ext cx="10761726" cy="18288"/>
-            </a:xfrm>
-            <a:custGeom>
-              <a:avLst/>
-              <a:gdLst/>
-              <a:ahLst/>
-              <a:cxnLst/>
-              <a:rect l="l" t="t" r="r" b="b"/>
-              <a:pathLst>
-                <a:path w="10761726" h="18288">
-                  <a:moveTo>
-                    <a:pt x="0" y="0"/>
-                  </a:moveTo>
-                  <a:lnTo>
-                    <a:pt x="10761726" y="0"/>
-                  </a:lnTo>
-                  <a:lnTo>
-                    <a:pt x="10761726" y="18288"/>
-                  </a:lnTo>
-                  <a:lnTo>
-                    <a:pt x="0" y="18288"/>
-                  </a:lnTo>
-                  <a:close/>
-                </a:path>
-              </a:pathLst>
-            </a:custGeom>
-            <a:solidFill>
-              <a:srgbClr val="1A2D5A"/>
-            </a:solidFill>
-          </p:spPr>
-          <p:txBody>
-            <a:bodyPr/>
-            <a:lstStyle/>
-            <a:p>
-              <a:endParaRPr lang="en-US"/>
-            </a:p>
-          </p:txBody>
-        </p:sp>
-      </p:grpSp>
-      <p:grpSp>
-        <p:nvGrpSpPr>
-          <p:cNvPr id="33" name="Group 33"/>
-          <p:cNvGrpSpPr/>
-          <p:nvPr/>
-        </p:nvGrpSpPr>
-        <p:grpSpPr>
-          <a:xfrm>
-            <a:off x="9471441" y="7483067"/>
-            <a:ext cx="617706" cy="21965"/>
-            <a:chOff x="0" y="0"/>
-            <a:chExt cx="823608" cy="29286"/>
-          </a:xfrm>
-        </p:grpSpPr>
-        <p:sp>
-          <p:nvSpPr>
-            <p:cNvPr id="34" name="Freeform 34"/>
-            <p:cNvSpPr/>
-            <p:nvPr/>
-          </p:nvSpPr>
-          <p:spPr>
-            <a:xfrm>
-              <a:off x="0" y="0"/>
-              <a:ext cx="823595" cy="29337"/>
-            </a:xfrm>
-            <a:custGeom>
-              <a:avLst/>
-              <a:gdLst/>
-              <a:ahLst/>
-              <a:cxnLst/>
-              <a:rect l="l" t="t" r="r" b="b"/>
-              <a:pathLst>
-                <a:path w="823595" h="29337">
-                  <a:moveTo>
-                    <a:pt x="0" y="0"/>
-                  </a:moveTo>
-                  <a:lnTo>
-                    <a:pt x="823595" y="0"/>
-                  </a:lnTo>
-                  <a:lnTo>
-                    <a:pt x="823595" y="29337"/>
-                  </a:lnTo>
-                  <a:lnTo>
-                    <a:pt x="0" y="29337"/>
-                  </a:lnTo>
-                  <a:close/>
-                </a:path>
-              </a:pathLst>
-            </a:custGeom>
-            <a:solidFill>
-              <a:srgbClr val="FFF2C2"/>
-            </a:solidFill>
-          </p:spPr>
-          <p:txBody>
-            <a:bodyPr/>
-            <a:lstStyle/>
-            <a:p>
-              <a:endParaRPr lang="en-US"/>
-            </a:p>
-          </p:txBody>
-        </p:sp>
-      </p:grpSp>
-      <p:grpSp>
-        <p:nvGrpSpPr>
-          <p:cNvPr id="35" name="Group 35"/>
-          <p:cNvGrpSpPr/>
-          <p:nvPr/>
-        </p:nvGrpSpPr>
-        <p:grpSpPr>
-          <a:xfrm>
-            <a:off x="9471441" y="7606606"/>
-            <a:ext cx="617706" cy="411804"/>
-            <a:chOff x="0" y="0"/>
-            <a:chExt cx="823608" cy="549072"/>
-          </a:xfrm>
-        </p:grpSpPr>
-        <p:sp>
-          <p:nvSpPr>
-            <p:cNvPr id="36" name="Freeform 36"/>
-            <p:cNvSpPr/>
-            <p:nvPr/>
-          </p:nvSpPr>
-          <p:spPr>
-            <a:xfrm>
-              <a:off x="0" y="0"/>
-              <a:ext cx="823603" cy="549069"/>
-            </a:xfrm>
-            <a:custGeom>
-              <a:avLst/>
-              <a:gdLst/>
-              <a:ahLst/>
-              <a:cxnLst/>
-              <a:rect l="l" t="t" r="r" b="b"/>
-              <a:pathLst>
-                <a:path w="823603" h="549069">
-                  <a:moveTo>
-                    <a:pt x="0" y="0"/>
-                  </a:moveTo>
-                  <a:lnTo>
-                    <a:pt x="823603" y="0"/>
-                  </a:lnTo>
-                  <a:lnTo>
-                    <a:pt x="823603" y="549069"/>
-                  </a:lnTo>
-                  <a:lnTo>
-                    <a:pt x="0" y="549069"/>
-                  </a:lnTo>
-                  <a:close/>
-                </a:path>
-              </a:pathLst>
-            </a:custGeom>
-            <a:blipFill>
-              <a:blip r:embed="rId3">
-                <a:alphaModFix amt="0"/>
-              </a:blip>
-              <a:stretch>
-                <a:fillRect l="-35535" r="-35536"/>
-              </a:stretch>
-            </a:blipFill>
-          </p:spPr>
-          <p:txBody>
-            <a:bodyPr/>
-            <a:lstStyle/>
-            <a:p>
-              <a:endParaRPr lang="en-US"/>
-            </a:p>
-          </p:txBody>
-        </p:sp>
-        <p:sp>
-          <p:nvSpPr>
-            <p:cNvPr id="37" name="TextBox 37"/>
-            <p:cNvSpPr txBox="1"/>
-            <p:nvPr/>
-          </p:nvSpPr>
-          <p:spPr>
-            <a:xfrm>
-              <a:off x="0" y="-9525"/>
-              <a:ext cx="823608" cy="558597"/>
-            </a:xfrm>
-            <a:prstGeom prst="rect">
-              <a:avLst/>
-            </a:prstGeom>
-          </p:spPr>
-          <p:txBody>
-            <a:bodyPr lIns="0" tIns="0" rIns="0" bIns="0" rtlCol="0" anchor="ctr"/>
-            <a:lstStyle/>
-            <a:p>
-              <a:pPr algn="l">
-                <a:lnSpc>
-                  <a:spcPts val="1801"/>
-                </a:lnSpc>
-              </a:pPr>
-              <a:r>
-                <a:rPr lang="en-US" sz="1501">
-                  <a:solidFill>
-                    <a:srgbClr val="FFF2C2"/>
-                  </a:solidFill>
-                  <a:latin typeface="JetBrains Mono"/>
-                  <a:ea typeface="JetBrains Mono"/>
-                  <a:cs typeface="JetBrains Mono"/>
-                  <a:sym typeface="JetBrains Mono"/>
-                </a:rPr>
-                <a:t>02</a:t>
-              </a:r>
-            </a:p>
-          </p:txBody>
-        </p:sp>
-      </p:grpSp>
-      <p:grpSp>
-        <p:nvGrpSpPr>
-          <p:cNvPr id="38" name="Group 38"/>
-          <p:cNvGrpSpPr/>
-          <p:nvPr/>
-        </p:nvGrpSpPr>
-        <p:grpSpPr>
-          <a:xfrm>
-            <a:off x="10130323" y="7579155"/>
-            <a:ext cx="7412431" cy="411804"/>
-            <a:chOff x="0" y="0"/>
-            <a:chExt cx="9883242" cy="549072"/>
-          </a:xfrm>
-        </p:grpSpPr>
-        <p:sp>
-          <p:nvSpPr>
-            <p:cNvPr id="39" name="Freeform 39"/>
-            <p:cNvSpPr/>
-            <p:nvPr/>
-          </p:nvSpPr>
-          <p:spPr>
-            <a:xfrm>
-              <a:off x="0" y="0"/>
-              <a:ext cx="9883241" cy="549069"/>
-            </a:xfrm>
-            <a:custGeom>
-              <a:avLst/>
-              <a:gdLst/>
-              <a:ahLst/>
-              <a:cxnLst/>
-              <a:rect l="l" t="t" r="r" b="b"/>
-              <a:pathLst>
-                <a:path w="9883241" h="549069">
-                  <a:moveTo>
-                    <a:pt x="0" y="0"/>
-                  </a:moveTo>
-                  <a:lnTo>
-                    <a:pt x="9883241" y="0"/>
-                  </a:lnTo>
-                  <a:lnTo>
-                    <a:pt x="9883241" y="549069"/>
-                  </a:lnTo>
-                  <a:lnTo>
-                    <a:pt x="0" y="549069"/>
-                  </a:lnTo>
-                  <a:close/>
-                </a:path>
-              </a:pathLst>
-            </a:custGeom>
-            <a:blipFill>
-              <a:blip r:embed="rId3">
-                <a:alphaModFix amt="0"/>
-              </a:blip>
-              <a:stretch>
-                <a:fillRect t="-300730" b="-300730"/>
-              </a:stretch>
-            </a:blipFill>
-          </p:spPr>
-          <p:txBody>
-            <a:bodyPr/>
-            <a:lstStyle/>
-            <a:p>
-              <a:endParaRPr lang="en-US"/>
-            </a:p>
-          </p:txBody>
-        </p:sp>
-        <p:sp>
-          <p:nvSpPr>
-            <p:cNvPr id="40" name="TextBox 40"/>
-            <p:cNvSpPr txBox="1"/>
-            <p:nvPr/>
-          </p:nvSpPr>
-          <p:spPr>
-            <a:xfrm>
-              <a:off x="0" y="-9525"/>
-              <a:ext cx="9883242" cy="558597"/>
-            </a:xfrm>
-            <a:prstGeom prst="rect">
-              <a:avLst/>
-            </a:prstGeom>
-          </p:spPr>
-          <p:txBody>
-            <a:bodyPr lIns="0" tIns="0" rIns="0" bIns="0" rtlCol="0" anchor="ctr"/>
-            <a:lstStyle/>
-            <a:p>
-              <a:pPr algn="l">
-                <a:lnSpc>
-                  <a:spcPts val="2341"/>
-                </a:lnSpc>
-              </a:pPr>
-              <a:r>
-                <a:rPr lang="en-US" sz="1951" b="1">
-                  <a:solidFill>
-                    <a:srgbClr val="F0F1F4"/>
-                  </a:solidFill>
-                  <a:latin typeface="Inter Bold"/>
-                  <a:ea typeface="Inter Bold"/>
-                  <a:cs typeface="Inter Bold"/>
-                  <a:sym typeface="Inter Bold"/>
-                </a:rPr>
-                <a:t>Hallucinates</a:t>
-              </a:r>
-            </a:p>
-          </p:txBody>
-        </p:sp>
-      </p:grpSp>
-      <p:sp>
-        <p:nvSpPr>
-          <p:cNvPr id="41" name="TextBox 41"/>
-          <p:cNvSpPr txBox="1"/>
-          <p:nvPr/>
-        </p:nvSpPr>
-        <p:spPr>
-          <a:xfrm>
-            <a:off x="10221763" y="8058806"/>
-            <a:ext cx="7133463" cy="778669"/>
-          </a:xfrm>
-          <a:prstGeom prst="rect">
-            <a:avLst/>
-          </a:prstGeom>
-        </p:spPr>
-        <p:txBody>
-          <a:bodyPr lIns="0" tIns="0" rIns="0" bIns="0" rtlCol="0" anchor="t">
-            <a:spAutoFit/>
-          </a:bodyPr>
-          <a:lstStyle/>
-          <a:p>
-            <a:pPr algn="l">
-              <a:lnSpc>
-                <a:spcPts val="2026"/>
-              </a:lnSpc>
-            </a:pPr>
-            <a:r>
-              <a:rPr lang="en-US" sz="1576">
-                <a:solidFill>
-                  <a:srgbClr val="9BA4BE"/>
-                </a:solidFill>
-                <a:latin typeface="Inter"/>
-                <a:ea typeface="Inter"/>
-                <a:cs typeface="Inter"/>
-                <a:sym typeface="Inter"/>
-              </a:rPr>
-              <a:t>Errors delivered as confidently as facts.</a:t>
-            </a:r>
-          </a:p>
-        </p:txBody>
-      </p:sp>
-      <p:grpSp>
-        <p:nvGrpSpPr>
-          <p:cNvPr id="42" name="Group 42"/>
-          <p:cNvGrpSpPr/>
-          <p:nvPr/>
-        </p:nvGrpSpPr>
-        <p:grpSpPr>
-          <a:xfrm>
-            <a:off x="754971" y="8927314"/>
-            <a:ext cx="8071314" cy="13726"/>
-            <a:chOff x="0" y="0"/>
-            <a:chExt cx="10761751" cy="18301"/>
-          </a:xfrm>
-        </p:grpSpPr>
-        <p:sp>
-          <p:nvSpPr>
-            <p:cNvPr id="43" name="Freeform 43"/>
-            <p:cNvSpPr/>
-            <p:nvPr/>
-          </p:nvSpPr>
-          <p:spPr>
-            <a:xfrm>
-              <a:off x="0" y="0"/>
-              <a:ext cx="10761726" cy="18288"/>
-            </a:xfrm>
-            <a:custGeom>
-              <a:avLst/>
-              <a:gdLst/>
-              <a:ahLst/>
-              <a:cxnLst/>
-              <a:rect l="l" t="t" r="r" b="b"/>
-              <a:pathLst>
-                <a:path w="10761726" h="18288">
-                  <a:moveTo>
-                    <a:pt x="0" y="0"/>
-                  </a:moveTo>
-                  <a:lnTo>
-                    <a:pt x="10761726" y="0"/>
-                  </a:lnTo>
-                  <a:lnTo>
-                    <a:pt x="10761726" y="18288"/>
-                  </a:lnTo>
-                  <a:lnTo>
-                    <a:pt x="0" y="18288"/>
-                  </a:lnTo>
-                  <a:close/>
-                </a:path>
-              </a:pathLst>
-            </a:custGeom>
-            <a:solidFill>
-              <a:srgbClr val="1A2D5A"/>
-            </a:solidFill>
-          </p:spPr>
-          <p:txBody>
-            <a:bodyPr/>
-            <a:lstStyle/>
-            <a:p>
-              <a:endParaRPr lang="en-US"/>
-            </a:p>
-          </p:txBody>
-        </p:sp>
-      </p:grpSp>
-      <p:grpSp>
-        <p:nvGrpSpPr>
-          <p:cNvPr id="44" name="Group 44"/>
-          <p:cNvGrpSpPr/>
-          <p:nvPr/>
-        </p:nvGrpSpPr>
-        <p:grpSpPr>
-          <a:xfrm>
-            <a:off x="754971" y="8923199"/>
-            <a:ext cx="617706" cy="21965"/>
-            <a:chOff x="0" y="0"/>
-            <a:chExt cx="823608" cy="29286"/>
-          </a:xfrm>
-        </p:grpSpPr>
-        <p:sp>
-          <p:nvSpPr>
-            <p:cNvPr id="45" name="Freeform 45"/>
-            <p:cNvSpPr/>
-            <p:nvPr/>
-          </p:nvSpPr>
-          <p:spPr>
-            <a:xfrm>
-              <a:off x="0" y="0"/>
-              <a:ext cx="823595" cy="29337"/>
-            </a:xfrm>
-            <a:custGeom>
-              <a:avLst/>
-              <a:gdLst/>
-              <a:ahLst/>
-              <a:cxnLst/>
-              <a:rect l="l" t="t" r="r" b="b"/>
-              <a:pathLst>
-                <a:path w="823595" h="29337">
-                  <a:moveTo>
-                    <a:pt x="0" y="0"/>
-                  </a:moveTo>
-                  <a:lnTo>
-                    <a:pt x="823595" y="0"/>
-                  </a:lnTo>
-                  <a:lnTo>
-                    <a:pt x="823595" y="29337"/>
-                  </a:lnTo>
-                  <a:lnTo>
-                    <a:pt x="0" y="29337"/>
-                  </a:lnTo>
-                  <a:close/>
-                </a:path>
-              </a:pathLst>
-            </a:custGeom>
-            <a:solidFill>
-              <a:srgbClr val="FFF2C2"/>
-            </a:solidFill>
-          </p:spPr>
-          <p:txBody>
-            <a:bodyPr/>
-            <a:lstStyle/>
-            <a:p>
-              <a:endParaRPr lang="en-US"/>
-            </a:p>
-          </p:txBody>
-        </p:sp>
-      </p:grpSp>
-      <p:grpSp>
-        <p:nvGrpSpPr>
-          <p:cNvPr id="46" name="Group 46"/>
-          <p:cNvGrpSpPr/>
-          <p:nvPr/>
-        </p:nvGrpSpPr>
-        <p:grpSpPr>
-          <a:xfrm>
-            <a:off x="754971" y="9046739"/>
-            <a:ext cx="617706" cy="411804"/>
-            <a:chOff x="0" y="0"/>
-            <a:chExt cx="823608" cy="549072"/>
-          </a:xfrm>
-        </p:grpSpPr>
-        <p:sp>
-          <p:nvSpPr>
-            <p:cNvPr id="47" name="Freeform 47"/>
-            <p:cNvSpPr/>
-            <p:nvPr/>
-          </p:nvSpPr>
-          <p:spPr>
-            <a:xfrm>
-              <a:off x="0" y="0"/>
-              <a:ext cx="823603" cy="549069"/>
-            </a:xfrm>
-            <a:custGeom>
-              <a:avLst/>
-              <a:gdLst/>
-              <a:ahLst/>
-              <a:cxnLst/>
-              <a:rect l="l" t="t" r="r" b="b"/>
-              <a:pathLst>
-                <a:path w="823603" h="549069">
-                  <a:moveTo>
-                    <a:pt x="0" y="0"/>
-                  </a:moveTo>
-                  <a:lnTo>
-                    <a:pt x="823603" y="0"/>
-                  </a:lnTo>
-                  <a:lnTo>
-                    <a:pt x="823603" y="549069"/>
-                  </a:lnTo>
-                  <a:lnTo>
-                    <a:pt x="0" y="549069"/>
-                  </a:lnTo>
-                  <a:close/>
-                </a:path>
-              </a:pathLst>
-            </a:custGeom>
-            <a:blipFill>
-              <a:blip r:embed="rId3">
-                <a:alphaModFix amt="0"/>
-              </a:blip>
-              <a:stretch>
-                <a:fillRect l="-35535" r="-35536"/>
-              </a:stretch>
-            </a:blipFill>
-          </p:spPr>
-          <p:txBody>
-            <a:bodyPr/>
-            <a:lstStyle/>
-            <a:p>
-              <a:endParaRPr lang="en-US"/>
-            </a:p>
-          </p:txBody>
-        </p:sp>
-        <p:sp>
-          <p:nvSpPr>
-            <p:cNvPr id="48" name="TextBox 48"/>
-            <p:cNvSpPr txBox="1"/>
-            <p:nvPr/>
-          </p:nvSpPr>
-          <p:spPr>
-            <a:xfrm>
-              <a:off x="0" y="-9525"/>
-              <a:ext cx="823608" cy="558597"/>
-            </a:xfrm>
-            <a:prstGeom prst="rect">
-              <a:avLst/>
-            </a:prstGeom>
-          </p:spPr>
-          <p:txBody>
-            <a:bodyPr lIns="0" tIns="0" rIns="0" bIns="0" rtlCol="0" anchor="ctr"/>
-            <a:lstStyle/>
-            <a:p>
-              <a:pPr algn="l">
-                <a:lnSpc>
-                  <a:spcPts val="1801"/>
-                </a:lnSpc>
-              </a:pPr>
-              <a:r>
-                <a:rPr lang="en-US" sz="1501">
-                  <a:solidFill>
-                    <a:srgbClr val="FFF2C2"/>
-                  </a:solidFill>
-                  <a:latin typeface="JetBrains Mono"/>
-                  <a:ea typeface="JetBrains Mono"/>
-                  <a:cs typeface="JetBrains Mono"/>
-                  <a:sym typeface="JetBrains Mono"/>
-                </a:rPr>
-                <a:t>03</a:t>
-              </a:r>
-            </a:p>
-          </p:txBody>
-        </p:sp>
-      </p:grpSp>
-      <p:grpSp>
-        <p:nvGrpSpPr>
-          <p:cNvPr id="49" name="Group 49"/>
-          <p:cNvGrpSpPr/>
-          <p:nvPr/>
-        </p:nvGrpSpPr>
-        <p:grpSpPr>
-          <a:xfrm>
-            <a:off x="1413853" y="9019288"/>
-            <a:ext cx="7412431" cy="411804"/>
-            <a:chOff x="0" y="0"/>
-            <a:chExt cx="9883242" cy="549072"/>
-          </a:xfrm>
-        </p:grpSpPr>
-        <p:sp>
-          <p:nvSpPr>
-            <p:cNvPr id="50" name="Freeform 50"/>
-            <p:cNvSpPr/>
-            <p:nvPr/>
-          </p:nvSpPr>
-          <p:spPr>
-            <a:xfrm>
-              <a:off x="0" y="0"/>
-              <a:ext cx="9883241" cy="549069"/>
-            </a:xfrm>
-            <a:custGeom>
-              <a:avLst/>
-              <a:gdLst/>
-              <a:ahLst/>
-              <a:cxnLst/>
-              <a:rect l="l" t="t" r="r" b="b"/>
-              <a:pathLst>
-                <a:path w="9883241" h="549069">
-                  <a:moveTo>
-                    <a:pt x="0" y="0"/>
-                  </a:moveTo>
-                  <a:lnTo>
-                    <a:pt x="9883241" y="0"/>
-                  </a:lnTo>
-                  <a:lnTo>
-                    <a:pt x="9883241" y="549069"/>
-                  </a:lnTo>
-                  <a:lnTo>
-                    <a:pt x="0" y="549069"/>
-                  </a:lnTo>
-                  <a:close/>
-                </a:path>
-              </a:pathLst>
-            </a:custGeom>
-            <a:blipFill>
-              <a:blip r:embed="rId3">
-                <a:alphaModFix amt="0"/>
-              </a:blip>
-              <a:stretch>
-                <a:fillRect t="-300730" b="-300730"/>
-              </a:stretch>
-            </a:blipFill>
-          </p:spPr>
-          <p:txBody>
-            <a:bodyPr/>
-            <a:lstStyle/>
-            <a:p>
-              <a:endParaRPr lang="en-US"/>
-            </a:p>
-          </p:txBody>
-        </p:sp>
-        <p:sp>
-          <p:nvSpPr>
-            <p:cNvPr id="51" name="TextBox 51"/>
-            <p:cNvSpPr txBox="1"/>
-            <p:nvPr/>
-          </p:nvSpPr>
-          <p:spPr>
-            <a:xfrm>
-              <a:off x="0" y="-9525"/>
-              <a:ext cx="9883242" cy="558597"/>
-            </a:xfrm>
-            <a:prstGeom prst="rect">
-              <a:avLst/>
-            </a:prstGeom>
-          </p:spPr>
-          <p:txBody>
-            <a:bodyPr lIns="0" tIns="0" rIns="0" bIns="0" rtlCol="0" anchor="ctr"/>
-            <a:lstStyle/>
-            <a:p>
-              <a:pPr algn="l">
-                <a:lnSpc>
-                  <a:spcPts val="2341"/>
-                </a:lnSpc>
-              </a:pPr>
-              <a:r>
-                <a:rPr lang="en-US" sz="1951" b="1">
-                  <a:solidFill>
-                    <a:srgbClr val="F0F1F4"/>
-                  </a:solidFill>
-                  <a:latin typeface="Inter Bold"/>
-                  <a:ea typeface="Inter Bold"/>
-                  <a:cs typeface="Inter Bold"/>
-                  <a:sym typeface="Inter Bold"/>
-                </a:rPr>
-                <a:t>Non-deterministic</a:t>
-              </a:r>
-            </a:p>
-          </p:txBody>
-        </p:sp>
-      </p:grpSp>
-      <p:sp>
-        <p:nvSpPr>
-          <p:cNvPr id="52" name="TextBox 52"/>
-          <p:cNvSpPr txBox="1"/>
-          <p:nvPr/>
-        </p:nvSpPr>
-        <p:spPr>
-          <a:xfrm>
-            <a:off x="1505293" y="9498938"/>
-            <a:ext cx="7133463" cy="778669"/>
-          </a:xfrm>
-          <a:prstGeom prst="rect">
-            <a:avLst/>
-          </a:prstGeom>
-        </p:spPr>
-        <p:txBody>
-          <a:bodyPr lIns="0" tIns="0" rIns="0" bIns="0" rtlCol="0" anchor="t">
-            <a:spAutoFit/>
-          </a:bodyPr>
-          <a:lstStyle/>
-          <a:p>
-            <a:pPr algn="l">
-              <a:lnSpc>
-                <a:spcPts val="2026"/>
-              </a:lnSpc>
-            </a:pPr>
-            <a:r>
-              <a:rPr lang="en-US" sz="1576">
-                <a:solidFill>
-                  <a:srgbClr val="9BA4BE"/>
-                </a:solidFill>
-                <a:latin typeface="Inter"/>
-                <a:ea typeface="Inter"/>
-                <a:cs typeface="Inter"/>
-                <a:sym typeface="Inter"/>
-              </a:rPr>
-              <a:t>The same question gets different answers.</a:t>
-            </a:r>
-          </a:p>
-        </p:txBody>
-      </p:sp>
-      <p:grpSp>
-        <p:nvGrpSpPr>
-          <p:cNvPr id="53" name="Group 53"/>
-          <p:cNvGrpSpPr/>
-          <p:nvPr/>
-        </p:nvGrpSpPr>
-        <p:grpSpPr>
-          <a:xfrm>
-            <a:off x="9471441" y="8927314"/>
-            <a:ext cx="8071314" cy="13726"/>
-            <a:chOff x="0" y="0"/>
-            <a:chExt cx="10761751" cy="18301"/>
-          </a:xfrm>
-        </p:grpSpPr>
-        <p:sp>
-          <p:nvSpPr>
-            <p:cNvPr id="54" name="Freeform 54"/>
-            <p:cNvSpPr/>
-            <p:nvPr/>
-          </p:nvSpPr>
-          <p:spPr>
-            <a:xfrm>
-              <a:off x="0" y="0"/>
-              <a:ext cx="10761726" cy="18288"/>
-            </a:xfrm>
-            <a:custGeom>
-              <a:avLst/>
-              <a:gdLst/>
-              <a:ahLst/>
-              <a:cxnLst/>
-              <a:rect l="l" t="t" r="r" b="b"/>
-              <a:pathLst>
-                <a:path w="10761726" h="18288">
-                  <a:moveTo>
-                    <a:pt x="0" y="0"/>
-                  </a:moveTo>
-                  <a:lnTo>
-                    <a:pt x="10761726" y="0"/>
-                  </a:lnTo>
-                  <a:lnTo>
-                    <a:pt x="10761726" y="18288"/>
-                  </a:lnTo>
-                  <a:lnTo>
-                    <a:pt x="0" y="18288"/>
-                  </a:lnTo>
-                  <a:close/>
-                </a:path>
-              </a:pathLst>
-            </a:custGeom>
-            <a:solidFill>
-              <a:srgbClr val="1A2D5A"/>
-            </a:solidFill>
-          </p:spPr>
-          <p:txBody>
-            <a:bodyPr/>
-            <a:lstStyle/>
-            <a:p>
-              <a:endParaRPr lang="en-US"/>
-            </a:p>
-          </p:txBody>
-        </p:sp>
-      </p:grpSp>
-      <p:grpSp>
-        <p:nvGrpSpPr>
-          <p:cNvPr id="55" name="Group 55"/>
-          <p:cNvGrpSpPr/>
-          <p:nvPr/>
-        </p:nvGrpSpPr>
-        <p:grpSpPr>
-          <a:xfrm>
-            <a:off x="9471441" y="8923199"/>
-            <a:ext cx="617706" cy="21965"/>
-            <a:chOff x="0" y="0"/>
-            <a:chExt cx="823608" cy="29286"/>
-          </a:xfrm>
-        </p:grpSpPr>
-        <p:sp>
-          <p:nvSpPr>
-            <p:cNvPr id="56" name="Freeform 56"/>
-            <p:cNvSpPr/>
-            <p:nvPr/>
-          </p:nvSpPr>
-          <p:spPr>
-            <a:xfrm>
-              <a:off x="0" y="0"/>
-              <a:ext cx="823595" cy="29337"/>
-            </a:xfrm>
-            <a:custGeom>
-              <a:avLst/>
-              <a:gdLst/>
-              <a:ahLst/>
-              <a:cxnLst/>
-              <a:rect l="l" t="t" r="r" b="b"/>
-              <a:pathLst>
-                <a:path w="823595" h="29337">
-                  <a:moveTo>
-                    <a:pt x="0" y="0"/>
-                  </a:moveTo>
-                  <a:lnTo>
-                    <a:pt x="823595" y="0"/>
-                  </a:lnTo>
-                  <a:lnTo>
-                    <a:pt x="823595" y="29337"/>
-                  </a:lnTo>
-                  <a:lnTo>
-                    <a:pt x="0" y="29337"/>
-                  </a:lnTo>
-                  <a:close/>
-                </a:path>
-              </a:pathLst>
-            </a:custGeom>
-            <a:solidFill>
-              <a:srgbClr val="FFF2C2"/>
-            </a:solidFill>
-          </p:spPr>
-          <p:txBody>
-            <a:bodyPr/>
-            <a:lstStyle/>
-            <a:p>
-              <a:endParaRPr lang="en-US"/>
-            </a:p>
-          </p:txBody>
-        </p:sp>
-      </p:grpSp>
-      <p:grpSp>
-        <p:nvGrpSpPr>
-          <p:cNvPr id="57" name="Group 57"/>
-          <p:cNvGrpSpPr/>
-          <p:nvPr/>
-        </p:nvGrpSpPr>
-        <p:grpSpPr>
-          <a:xfrm>
-            <a:off x="9471441" y="9046739"/>
-            <a:ext cx="617706" cy="411804"/>
-            <a:chOff x="0" y="0"/>
-            <a:chExt cx="823608" cy="549072"/>
-          </a:xfrm>
-        </p:grpSpPr>
-        <p:sp>
-          <p:nvSpPr>
-            <p:cNvPr id="58" name="Freeform 58"/>
-            <p:cNvSpPr/>
-            <p:nvPr/>
-          </p:nvSpPr>
-          <p:spPr>
-            <a:xfrm>
-              <a:off x="0" y="0"/>
-              <a:ext cx="823603" cy="549069"/>
-            </a:xfrm>
-            <a:custGeom>
-              <a:avLst/>
-              <a:gdLst/>
-              <a:ahLst/>
-              <a:cxnLst/>
-              <a:rect l="l" t="t" r="r" b="b"/>
-              <a:pathLst>
-                <a:path w="823603" h="549069">
-                  <a:moveTo>
-                    <a:pt x="0" y="0"/>
-                  </a:moveTo>
-                  <a:lnTo>
-                    <a:pt x="823603" y="0"/>
-                  </a:lnTo>
-                  <a:lnTo>
-                    <a:pt x="823603" y="549069"/>
-                  </a:lnTo>
-                  <a:lnTo>
-                    <a:pt x="0" y="549069"/>
-                  </a:lnTo>
-                  <a:close/>
-                </a:path>
-              </a:pathLst>
-            </a:custGeom>
-            <a:blipFill>
-              <a:blip r:embed="rId3">
-                <a:alphaModFix amt="0"/>
-              </a:blip>
-              <a:stretch>
-                <a:fillRect l="-35535" r="-35536"/>
-              </a:stretch>
-            </a:blipFill>
-          </p:spPr>
-          <p:txBody>
-            <a:bodyPr/>
-            <a:lstStyle/>
-            <a:p>
-              <a:endParaRPr lang="en-US"/>
-            </a:p>
-          </p:txBody>
-        </p:sp>
-        <p:sp>
-          <p:nvSpPr>
-            <p:cNvPr id="59" name="TextBox 59"/>
-            <p:cNvSpPr txBox="1"/>
-            <p:nvPr/>
-          </p:nvSpPr>
-          <p:spPr>
-            <a:xfrm>
-              <a:off x="0" y="-9525"/>
-              <a:ext cx="823608" cy="558597"/>
-            </a:xfrm>
-            <a:prstGeom prst="rect">
-              <a:avLst/>
-            </a:prstGeom>
-          </p:spPr>
-          <p:txBody>
-            <a:bodyPr lIns="0" tIns="0" rIns="0" bIns="0" rtlCol="0" anchor="ctr"/>
-            <a:lstStyle/>
-            <a:p>
-              <a:pPr algn="l">
-                <a:lnSpc>
-                  <a:spcPts val="1801"/>
-                </a:lnSpc>
-              </a:pPr>
-              <a:r>
-                <a:rPr lang="en-US" sz="1501">
-                  <a:solidFill>
-                    <a:srgbClr val="FFF2C2"/>
-                  </a:solidFill>
-                  <a:latin typeface="JetBrains Mono"/>
-                  <a:ea typeface="JetBrains Mono"/>
-                  <a:cs typeface="JetBrains Mono"/>
-                  <a:sym typeface="JetBrains Mono"/>
-                </a:rPr>
-                <a:t>04</a:t>
-              </a:r>
-            </a:p>
-          </p:txBody>
-        </p:sp>
-      </p:grpSp>
-      <p:grpSp>
-        <p:nvGrpSpPr>
-          <p:cNvPr id="60" name="Group 60"/>
-          <p:cNvGrpSpPr/>
-          <p:nvPr/>
-        </p:nvGrpSpPr>
-        <p:grpSpPr>
-          <a:xfrm>
-            <a:off x="10130323" y="9019288"/>
-            <a:ext cx="7412431" cy="411804"/>
-            <a:chOff x="0" y="0"/>
-            <a:chExt cx="9883242" cy="549072"/>
-          </a:xfrm>
-        </p:grpSpPr>
-        <p:sp>
-          <p:nvSpPr>
-            <p:cNvPr id="61" name="Freeform 61"/>
-            <p:cNvSpPr/>
-            <p:nvPr/>
-          </p:nvSpPr>
-          <p:spPr>
-            <a:xfrm>
-              <a:off x="0" y="0"/>
-              <a:ext cx="9883241" cy="549069"/>
-            </a:xfrm>
-            <a:custGeom>
-              <a:avLst/>
-              <a:gdLst/>
-              <a:ahLst/>
-              <a:cxnLst/>
-              <a:rect l="l" t="t" r="r" b="b"/>
-              <a:pathLst>
-                <a:path w="9883241" h="549069">
-                  <a:moveTo>
-                    <a:pt x="0" y="0"/>
-                  </a:moveTo>
-                  <a:lnTo>
-                    <a:pt x="9883241" y="0"/>
-                  </a:lnTo>
-                  <a:lnTo>
-                    <a:pt x="9883241" y="549069"/>
-                  </a:lnTo>
-                  <a:lnTo>
-                    <a:pt x="0" y="549069"/>
-                  </a:lnTo>
-                  <a:close/>
-                </a:path>
-              </a:pathLst>
-            </a:custGeom>
-            <a:blipFill>
-              <a:blip r:embed="rId3">
-                <a:alphaModFix amt="0"/>
-              </a:blip>
-              <a:stretch>
-                <a:fillRect t="-300730" b="-300730"/>
-              </a:stretch>
-            </a:blipFill>
-          </p:spPr>
-          <p:txBody>
-            <a:bodyPr/>
-            <a:lstStyle/>
-            <a:p>
-              <a:endParaRPr lang="en-US"/>
-            </a:p>
-          </p:txBody>
-        </p:sp>
-        <p:sp>
-          <p:nvSpPr>
-            <p:cNvPr id="62" name="TextBox 62"/>
-            <p:cNvSpPr txBox="1"/>
-            <p:nvPr/>
-          </p:nvSpPr>
-          <p:spPr>
-            <a:xfrm>
-              <a:off x="0" y="-9525"/>
-              <a:ext cx="9883242" cy="558597"/>
-            </a:xfrm>
-            <a:prstGeom prst="rect">
-              <a:avLst/>
-            </a:prstGeom>
-          </p:spPr>
-          <p:txBody>
-            <a:bodyPr lIns="0" tIns="0" rIns="0" bIns="0" rtlCol="0" anchor="ctr"/>
-            <a:lstStyle/>
-            <a:p>
-              <a:pPr algn="l">
-                <a:lnSpc>
-                  <a:spcPts val="2341"/>
-                </a:lnSpc>
-              </a:pPr>
-              <a:r>
-                <a:rPr lang="en-US" sz="1951" b="1">
-                  <a:solidFill>
-                    <a:srgbClr val="F0F1F4"/>
-                  </a:solidFill>
-                  <a:latin typeface="Inter Bold"/>
-                  <a:ea typeface="Inter Bold"/>
-                  <a:cs typeface="Inter Bold"/>
-                  <a:sym typeface="Inter Bold"/>
-                </a:rPr>
-                <a:t>Expensive</a:t>
-              </a:r>
-            </a:p>
-          </p:txBody>
-        </p:sp>
-      </p:grpSp>
-      <p:sp>
-        <p:nvSpPr>
-          <p:cNvPr id="63" name="TextBox 63"/>
-          <p:cNvSpPr txBox="1"/>
-          <p:nvPr/>
-        </p:nvSpPr>
-        <p:spPr>
-          <a:xfrm>
-            <a:off x="10221763" y="9498938"/>
-            <a:ext cx="7133463" cy="778669"/>
-          </a:xfrm>
-          <a:prstGeom prst="rect">
-            <a:avLst/>
-          </a:prstGeom>
-        </p:spPr>
-        <p:txBody>
-          <a:bodyPr lIns="0" tIns="0" rIns="0" bIns="0" rtlCol="0" anchor="t">
-            <a:spAutoFit/>
-          </a:bodyPr>
-          <a:lstStyle/>
-          <a:p>
-            <a:pPr algn="l">
-              <a:lnSpc>
-                <a:spcPts val="2026"/>
-              </a:lnSpc>
-            </a:pPr>
-            <a:r>
-              <a:rPr lang="en-US" sz="1576">
-                <a:solidFill>
-                  <a:srgbClr val="9BA4BE"/>
-                </a:solidFill>
-                <a:latin typeface="Inter"/>
-                <a:ea typeface="Inter"/>
-                <a:cs typeface="Inter"/>
-                <a:sym typeface="Inter"/>
-              </a:rPr>
-              <a:t>Per-row inference drives costs up an order of magnitude.</a:t>
-            </a:r>
-          </a:p>
-        </p:txBody>
-      </p:sp>
     </p:spTree>
   </p:cSld>
   <p:clrMapOvr>
@@ -10673,7 +8501,7 @@
 </p:sld>
 </file>
 
-<file path=ppt/slides/slide6.xml><?xml version="1.0" encoding="utf-8"?>
+<file path=ppt/slides/slide5.xml><?xml version="1.0" encoding="utf-8"?>
 <p:sld xmlns:a="http://schemas.openxmlformats.org/drawingml/2006/main" xmlns:r="http://schemas.openxmlformats.org/officeDocument/2006/relationships" xmlns:p="http://schemas.openxmlformats.org/presentationml/2006/main">
   <p:cSld>
     <p:bg>
@@ -11117,7 +8945,7 @@
                 </a:lnSpc>
               </a:pPr>
               <a:r>
-                <a:rPr lang="en-US" sz="1951">
+                <a:rPr lang="en-US" sz="1951" dirty="0">
                   <a:solidFill>
                     <a:srgbClr val="9BA4BE"/>
                   </a:solidFill>
@@ -11126,7 +8954,7 @@
                   <a:cs typeface="Inter"/>
                   <a:sym typeface="Inter"/>
                 </a:rPr>
-                <a:t>Belvedere applies AI at design time. What runs in production is approved, tested code that never improvises.</a:t>
+                <a:t>AI is best at design time. Data is handled by scalable, traceable code that never improvises. Knowledge is abstracted and retained.</a:t>
               </a:r>
             </a:p>
           </p:txBody>
@@ -11302,74 +9130,6 @@
       </p:grpSp>
       <p:grpSp>
         <p:nvGrpSpPr>
-          <p:cNvPr id="18" name="Group 18"/>
-          <p:cNvGrpSpPr/>
-          <p:nvPr/>
-        </p:nvGrpSpPr>
-        <p:grpSpPr>
-          <a:xfrm>
-            <a:off x="754971" y="2637826"/>
-            <a:ext cx="16791899" cy="6229251"/>
-            <a:chOff x="0" y="0"/>
-            <a:chExt cx="20132523" cy="7468514"/>
-          </a:xfrm>
-        </p:grpSpPr>
-        <p:sp>
-          <p:nvSpPr>
-            <p:cNvPr id="19" name="Freeform 19" descr="/Users/hstrauss/Documents/GitHub/belvedere-pm/output/deck-rebuild/illus/stance.png"/>
-            <p:cNvSpPr/>
-            <p:nvPr/>
-          </p:nvSpPr>
-          <p:spPr>
-            <a:xfrm>
-              <a:off x="0" y="0"/>
-              <a:ext cx="20132548" cy="7468489"/>
-            </a:xfrm>
-            <a:custGeom>
-              <a:avLst/>
-              <a:gdLst/>
-              <a:ahLst/>
-              <a:cxnLst/>
-              <a:rect l="l" t="t" r="r" b="b"/>
-              <a:pathLst>
-                <a:path w="20132548" h="7468489">
-                  <a:moveTo>
-                    <a:pt x="0" y="0"/>
-                  </a:moveTo>
-                  <a:lnTo>
-                    <a:pt x="20132548" y="0"/>
-                  </a:lnTo>
-                  <a:lnTo>
-                    <a:pt x="20132548" y="7468489"/>
-                  </a:lnTo>
-                  <a:lnTo>
-                    <a:pt x="0" y="7468489"/>
-                  </a:lnTo>
-                  <a:lnTo>
-                    <a:pt x="0" y="0"/>
-                  </a:lnTo>
-                  <a:close/>
-                </a:path>
-              </a:pathLst>
-            </a:custGeom>
-            <a:blipFill>
-              <a:blip r:embed="rId5"/>
-              <a:stretch>
-                <a:fillRect/>
-              </a:stretch>
-            </a:blipFill>
-          </p:spPr>
-          <p:txBody>
-            <a:bodyPr/>
-            <a:lstStyle/>
-            <a:p>
-              <a:endParaRPr lang="en-US"/>
-            </a:p>
-          </p:txBody>
-        </p:sp>
-      </p:grpSp>
-      <p:grpSp>
-        <p:nvGrpSpPr>
           <p:cNvPr id="20" name="Group 20"/>
           <p:cNvGrpSpPr/>
           <p:nvPr/>
@@ -11459,7 +9219,7 @@
                 </a:lnSpc>
               </a:pPr>
               <a:r>
-                <a:rPr lang="en-US" sz="1351" spc="225">
+                <a:rPr lang="en-US" sz="1351" spc="225" dirty="0">
                   <a:solidFill>
                     <a:srgbClr val="8590B3"/>
                   </a:solidFill>
@@ -11478,7 +9238,7 @@
                 </a:lnSpc>
               </a:pPr>
               <a:r>
-                <a:rPr lang="en-US" sz="1351" spc="225">
+                <a:rPr lang="en-US" sz="1351" spc="225" dirty="0">
                   <a:solidFill>
                     <a:srgbClr val="8590B3"/>
                   </a:solidFill>
@@ -11487,7 +9247,7 @@
                   <a:cs typeface="JetBrains Mono"/>
                   <a:sym typeface="JetBrains Mono"/>
                 </a:rPr>
-                <a:t>OPAQUE, VARIABLE, EXPENSIVE</a:t>
+                <a:t>RISKS: OPAQUE, VARIABLE, EXPENSIVE, HALLUCINATING</a:t>
               </a:r>
             </a:p>
           </p:txBody>
@@ -11501,8 +9261,8 @@
         </p:nvGrpSpPr>
         <p:grpSpPr>
           <a:xfrm>
-            <a:off x="9931928" y="8447279"/>
-            <a:ext cx="7327372" cy="839596"/>
+            <a:off x="9372599" y="8447279"/>
+            <a:ext cx="8586069" cy="839596"/>
             <a:chOff x="0" y="0"/>
             <a:chExt cx="8785098" cy="1006627"/>
           </a:xfrm>
@@ -11584,7 +9344,7 @@
                 </a:lnSpc>
               </a:pPr>
               <a:r>
-                <a:rPr lang="en-US" sz="1351" spc="225">
+                <a:rPr lang="en-US" sz="1351" spc="225" dirty="0">
                   <a:solidFill>
                     <a:srgbClr val="FFF2C2"/>
                   </a:solidFill>
@@ -11603,7 +9363,7 @@
                 </a:lnSpc>
               </a:pPr>
               <a:r>
-                <a:rPr lang="en-US" sz="1351" spc="225">
+                <a:rPr lang="en-US" sz="1351" spc="225" dirty="0">
                   <a:solidFill>
                     <a:srgbClr val="FFF2C2"/>
                   </a:solidFill>
@@ -11612,7 +9372,7 @@
                   <a:cs typeface="JetBrains Mono"/>
                   <a:sym typeface="JetBrains Mono"/>
                 </a:rPr>
-                <a:t>DETERMINISTIC CODE IN PRODUCTION</a:t>
+                <a:t>DETERMINISTIC CODE IN PRODUCTION, FORMAL KNOWLEDGE COMPOUNDS</a:t>
               </a:r>
             </a:p>
           </p:txBody>
@@ -11704,74 +9464,6 @@
                 </a:lnSpc>
               </a:pPr>
               <a:endParaRPr/>
-            </a:p>
-          </p:txBody>
-        </p:sp>
-      </p:grpSp>
-      <p:grpSp>
-        <p:nvGrpSpPr>
-          <p:cNvPr id="29" name="Group 29"/>
-          <p:cNvGrpSpPr/>
-          <p:nvPr/>
-        </p:nvGrpSpPr>
-        <p:grpSpPr>
-          <a:xfrm>
-            <a:off x="13917112" y="3199432"/>
-            <a:ext cx="864756" cy="901518"/>
-            <a:chOff x="0" y="0"/>
-            <a:chExt cx="1053363" cy="1098144"/>
-          </a:xfrm>
-        </p:grpSpPr>
-        <p:sp>
-          <p:nvSpPr>
-            <p:cNvPr id="30" name="Freeform 30" descr="/Users/hstrauss/Documents/GitHub/belvedere-pm/output/deck-rebuild/belv_mark.png"/>
-            <p:cNvSpPr/>
-            <p:nvPr/>
-          </p:nvSpPr>
-          <p:spPr>
-            <a:xfrm>
-              <a:off x="0" y="0"/>
-              <a:ext cx="1053338" cy="1098169"/>
-            </a:xfrm>
-            <a:custGeom>
-              <a:avLst/>
-              <a:gdLst/>
-              <a:ahLst/>
-              <a:cxnLst/>
-              <a:rect l="l" t="t" r="r" b="b"/>
-              <a:pathLst>
-                <a:path w="1053338" h="1098169">
-                  <a:moveTo>
-                    <a:pt x="0" y="0"/>
-                  </a:moveTo>
-                  <a:lnTo>
-                    <a:pt x="1053338" y="0"/>
-                  </a:lnTo>
-                  <a:lnTo>
-                    <a:pt x="1053338" y="1098169"/>
-                  </a:lnTo>
-                  <a:lnTo>
-                    <a:pt x="0" y="1098169"/>
-                  </a:lnTo>
-                  <a:lnTo>
-                    <a:pt x="0" y="0"/>
-                  </a:lnTo>
-                  <a:close/>
-                </a:path>
-              </a:pathLst>
-            </a:custGeom>
-            <a:blipFill>
-              <a:blip r:embed="rId4"/>
-              <a:stretch>
-                <a:fillRect r="-2" b="2"/>
-              </a:stretch>
-            </a:blipFill>
-          </p:spPr>
-          <p:txBody>
-            <a:bodyPr/>
-            <a:lstStyle/>
-            <a:p>
-              <a:endParaRPr lang="en-US"/>
             </a:p>
           </p:txBody>
         </p:sp>
@@ -11882,6 +9574,88 @@
           </p:txBody>
         </p:sp>
       </p:grpSp>
+      <p:pic>
+        <p:nvPicPr>
+          <p:cNvPr id="37" name="Picture 36">
+            <a:extLst>
+              <a:ext uri="{FF2B5EF4-FFF2-40B4-BE49-F238E27FC236}">
+                <a16:creationId xmlns:a16="http://schemas.microsoft.com/office/drawing/2014/main" id="{AAE0C80C-FBB6-1C9A-B55B-C06412E01648}"/>
+              </a:ext>
+            </a:extLst>
+          </p:cNvPr>
+          <p:cNvPicPr>
+            <a:picLocks noChangeAspect="1"/>
+          </p:cNvPicPr>
+          <p:nvPr/>
+        </p:nvPicPr>
+        <p:blipFill>
+          <a:blip r:embed="rId5"/>
+          <a:stretch>
+            <a:fillRect/>
+          </a:stretch>
+        </p:blipFill>
+        <p:spPr>
+          <a:xfrm>
+            <a:off x="138372" y="2386090"/>
+            <a:ext cx="17844828" cy="6081880"/>
+          </a:xfrm>
+          <a:prstGeom prst="rect">
+            <a:avLst/>
+          </a:prstGeom>
+        </p:spPr>
+      </p:pic>
+      <p:sp>
+        <p:nvSpPr>
+          <p:cNvPr id="34" name="&quot;Not Allowed&quot; Symbol 33">
+            <a:extLst>
+              <a:ext uri="{FF2B5EF4-FFF2-40B4-BE49-F238E27FC236}">
+                <a16:creationId xmlns:a16="http://schemas.microsoft.com/office/drawing/2014/main" id="{CB35CE39-8921-0A17-4E0A-AC17B3E73541}"/>
+              </a:ext>
+            </a:extLst>
+          </p:cNvPr>
+          <p:cNvSpPr/>
+          <p:nvPr/>
+        </p:nvSpPr>
+        <p:spPr>
+          <a:xfrm>
+            <a:off x="2895600" y="3453101"/>
+            <a:ext cx="3733800" cy="3627120"/>
+          </a:xfrm>
+          <a:prstGeom prst="noSmoking">
+            <a:avLst>
+              <a:gd name="adj" fmla="val 3883"/>
+            </a:avLst>
+          </a:prstGeom>
+        </p:spPr>
+        <p:style>
+          <a:lnRef idx="2">
+            <a:schemeClr val="accent1">
+              <a:shade val="15000"/>
+            </a:schemeClr>
+          </a:lnRef>
+          <a:fillRef idx="1">
+            <a:schemeClr val="accent1"/>
+          </a:fillRef>
+          <a:effectRef idx="0">
+            <a:schemeClr val="accent1"/>
+          </a:effectRef>
+          <a:fontRef idx="minor">
+            <a:schemeClr val="lt1"/>
+          </a:fontRef>
+        </p:style>
+        <p:txBody>
+          <a:bodyPr rtlCol="0" anchor="ctr"/>
+          <a:lstStyle/>
+          <a:p>
+            <a:pPr algn="ctr"/>
+            <a:endParaRPr lang="en-US">
+              <a:solidFill>
+                <a:schemeClr val="tx1"/>
+              </a:solidFill>
+            </a:endParaRPr>
+          </a:p>
+        </p:txBody>
+      </p:sp>
     </p:spTree>
   </p:cSld>
   <p:clrMapOvr>
@@ -11890,7 +9664,7 @@
 </p:sld>
 </file>
 
-<file path=ppt/slides/slide7.xml><?xml version="1.0" encoding="utf-8"?>
+<file path=ppt/slides/slide6.xml><?xml version="1.0" encoding="utf-8"?>
 <p:sld xmlns:a="http://schemas.openxmlformats.org/drawingml/2006/main" xmlns:r="http://schemas.openxmlformats.org/officeDocument/2006/relationships" xmlns:p="http://schemas.openxmlformats.org/presentationml/2006/main">
   <p:cSld>
     <p:bg>
@@ -14485,8 +12259,8 @@
               </p:nvSpPr>
               <p:spPr>
                 <a:xfrm>
-                  <a:off x="10972800" y="9338062"/>
-                  <a:ext cx="2743200" cy="682238"/>
+                  <a:off x="10915801" y="9338062"/>
+                  <a:ext cx="2800199" cy="682238"/>
                 </a:xfrm>
                 <a:prstGeom prst="rect">
                   <a:avLst/>
@@ -14514,7 +12288,7 @@
                       <a:cs typeface="Inter Bold"/>
                       <a:sym typeface="Inter Bold"/>
                     </a:rPr>
-                    <a:t>Agentic Acceleration</a:t>
+                    <a:t>Agentic Acceleration:</a:t>
                   </a:r>
                 </a:p>
                 <a:p>
